--- a/ppt/路端电压与负载的关系 电阻表的原理.pptx
+++ b/ppt/路端电压与负载的关系 电阻表的原理.pptx
@@ -6,14 +6,15 @@
   </p:sldMasterIdLst>
   <p:sldIdLst>
     <p:sldId id="256" r:id="rId2"/>
-    <p:sldId id="350" r:id="rId3"/>
-    <p:sldId id="257" r:id="rId4"/>
-    <p:sldId id="258" r:id="rId5"/>
-    <p:sldId id="351" r:id="rId6"/>
-    <p:sldId id="352" r:id="rId7"/>
-    <p:sldId id="326" r:id="rId8"/>
-    <p:sldId id="284" r:id="rId9"/>
-    <p:sldId id="285" r:id="rId10"/>
+    <p:sldId id="353" r:id="rId3"/>
+    <p:sldId id="350" r:id="rId4"/>
+    <p:sldId id="257" r:id="rId5"/>
+    <p:sldId id="258" r:id="rId6"/>
+    <p:sldId id="351" r:id="rId7"/>
+    <p:sldId id="352" r:id="rId8"/>
+    <p:sldId id="326" r:id="rId9"/>
+    <p:sldId id="284" r:id="rId10"/>
+    <p:sldId id="285" r:id="rId11"/>
   </p:sldIdLst>
   <p:sldSz cx="12192000" cy="6858000"/>
   <p:notesSz cx="6858000" cy="9144000"/>
@@ -280,7 +281,7 @@
           <a:p>
             <a:fld id="{8CA95057-F28B-4021-A46F-4C2D267CFC9D}" type="datetimeFigureOut">
               <a:rPr lang="en-US" smtClean="0"/>
-              <a:t>6/12/26</a:t>
+              <a:t>9/4/26</a:t>
             </a:fld>
             <a:endParaRPr lang="en-US"/>
           </a:p>
@@ -523,7 +524,7 @@
           <a:p>
             <a:fld id="{8CA95057-F28B-4021-A46F-4C2D267CFC9D}" type="datetimeFigureOut">
               <a:rPr lang="en-US" smtClean="0"/>
-              <a:t>6/12/26</a:t>
+              <a:t>9/4/26</a:t>
             </a:fld>
             <a:endParaRPr lang="en-US"/>
           </a:p>
@@ -702,7 +703,7 @@
           <a:p>
             <a:fld id="{8CA95057-F28B-4021-A46F-4C2D267CFC9D}" type="datetimeFigureOut">
               <a:rPr lang="en-US" smtClean="0"/>
-              <a:t>6/12/26</a:t>
+              <a:t>9/4/26</a:t>
             </a:fld>
             <a:endParaRPr lang="en-US"/>
           </a:p>
@@ -859,7 +860,7 @@
           <a:p>
             <a:fld id="{8CA95057-F28B-4021-A46F-4C2D267CFC9D}" type="datetimeFigureOut">
               <a:rPr lang="en-US" smtClean="0"/>
-              <a:t>6/12/26</a:t>
+              <a:t>9/4/26</a:t>
             </a:fld>
             <a:endParaRPr lang="en-US"/>
           </a:p>
@@ -1137,7 +1138,7 @@
           <a:p>
             <a:fld id="{8CA95057-F28B-4021-A46F-4C2D267CFC9D}" type="datetimeFigureOut">
               <a:rPr lang="en-US" smtClean="0"/>
-              <a:t>6/12/26</a:t>
+              <a:t>9/4/26</a:t>
             </a:fld>
             <a:endParaRPr lang="en-US"/>
           </a:p>
@@ -1562,7 +1563,7 @@
           <a:p>
             <a:fld id="{8CA95057-F28B-4021-A46F-4C2D267CFC9D}" type="datetimeFigureOut">
               <a:rPr lang="en-US" smtClean="0"/>
-              <a:t>6/12/26</a:t>
+              <a:t>9/4/26</a:t>
             </a:fld>
             <a:endParaRPr lang="en-US"/>
           </a:p>
@@ -1835,7 +1836,7 @@
           <a:p>
             <a:fld id="{8CA95057-F28B-4021-A46F-4C2D267CFC9D}" type="datetimeFigureOut">
               <a:rPr lang="en-US" smtClean="0"/>
-              <a:t>6/12/26</a:t>
+              <a:t>9/4/26</a:t>
             </a:fld>
             <a:endParaRPr lang="en-US"/>
           </a:p>
@@ -2332,7 +2333,1179 @@
 </p:sld>
 </file>
 
+<file path=ppt/slides/slide10.xml><?xml version="1.0" encoding="utf-8"?>
+<p:sld xmlns:a="http://schemas.openxmlformats.org/drawingml/2006/main" xmlns:r="http://schemas.openxmlformats.org/officeDocument/2006/relationships" xmlns:p="http://schemas.openxmlformats.org/presentationml/2006/main">
+  <p:cSld>
+    <p:spTree>
+      <p:nvGrpSpPr>
+        <p:cNvPr id="1" name="YT"/>
+        <p:cNvGrpSpPr/>
+        <p:nvPr/>
+      </p:nvGrpSpPr>
+      <p:grpSpPr>
+        <a:xfrm>
+          <a:off x="0" y="0"/>
+          <a:ext cx="0" cy="0"/>
+          <a:chOff x="0" y="0"/>
+          <a:chExt cx="0" cy="0"/>
+        </a:xfrm>
+      </p:grpSpPr>
+      <p:sp>
+        <p:nvSpPr>
+          <p:cNvPr id="16425" name="yt_shape_16425"/>
+          <p:cNvSpPr txBox="1"/>
+          <p:nvPr/>
+        </p:nvSpPr>
+        <p:spPr>
+          <a:xfrm>
+            <a:off x="324071" y="467999"/>
+            <a:ext cx="11924914" cy="2322752"/>
+          </a:xfrm>
+          <a:prstGeom prst="rect">
+            <a:avLst/>
+          </a:prstGeom>
+        </p:spPr>
+        <p:txBody>
+          <a:bodyPr vert="horz" wrap="square" lIns="0" tIns="0" rIns="0" bIns="0" rtlCol="0">
+            <a:noAutofit/>
+          </a:bodyPr>
+          <a:lstStyle/>
+          <a:p>
+            <a:pPr algn="l" eaLnBrk="1" latinLnBrk="0" hangingPunct="0">
+              <a:lnSpc>
+                <a:spcPct val="140000"/>
+              </a:lnSpc>
+            </a:pPr>
+            <a:r>
+              <a:rPr lang="zh-CN" altLang="zh-CN" sz="2800" b="1" i="0" u="none">
+                <a:solidFill>
+                  <a:srgbClr val="000000"/>
+                </a:solidFill>
+                <a:effectLst/>
+                <a:latin typeface="Times New Roman" pitchFamily="28"/>
+                <a:ea typeface="微软雅黑" pitchFamily="28"/>
+              </a:rPr>
+              <a:t>【例</a:t>
+            </a:r>
+            <a:r>
+              <a:rPr lang="en-US" altLang="zh-CN" sz="2800" b="1" i="0" u="none">
+                <a:solidFill>
+                  <a:srgbClr val="000000"/>
+                </a:solidFill>
+                <a:effectLst/>
+                <a:latin typeface="Times New Roman" pitchFamily="28"/>
+                <a:ea typeface="微软雅黑" pitchFamily="28"/>
+              </a:rPr>
+              <a:t>2</a:t>
+            </a:r>
+            <a:r>
+              <a:rPr lang="zh-CN" altLang="zh-CN" sz="2800" b="1" i="0" u="none">
+                <a:solidFill>
+                  <a:srgbClr val="000000"/>
+                </a:solidFill>
+                <a:effectLst/>
+                <a:latin typeface="Times New Roman" pitchFamily="28"/>
+                <a:ea typeface="微软雅黑" pitchFamily="28"/>
+              </a:rPr>
+              <a:t>】　</a:t>
+            </a:r>
+            <a:r>
+              <a:rPr lang="zh-CN" altLang="zh-CN" sz="2800" b="0" i="0" u="none">
+                <a:solidFill>
+                  <a:srgbClr val="000000"/>
+                </a:solidFill>
+                <a:effectLst/>
+                <a:latin typeface="宋体" pitchFamily="28"/>
+                <a:ea typeface="宋体" pitchFamily="28"/>
+              </a:rPr>
+              <a:t>（</a:t>
+            </a:r>
+            <a:r>
+              <a:rPr lang="zh-CN" altLang="zh-CN" sz="2800" b="0" i="0" u="none">
+                <a:solidFill>
+                  <a:srgbClr val="000000"/>
+                </a:solidFill>
+                <a:effectLst/>
+                <a:latin typeface="Times New Roman" pitchFamily="28"/>
+                <a:ea typeface="楷体" pitchFamily="28"/>
+              </a:rPr>
+              <a:t>路端电压的计算</a:t>
+            </a:r>
+            <a:r>
+              <a:rPr lang="zh-CN" altLang="zh-CN" sz="2800" b="0" i="0" u="none">
+                <a:solidFill>
+                  <a:srgbClr val="000000"/>
+                </a:solidFill>
+                <a:effectLst/>
+                <a:latin typeface="宋体" pitchFamily="28"/>
+                <a:ea typeface="宋体" pitchFamily="28"/>
+              </a:rPr>
+              <a:t>）</a:t>
+            </a:r>
+            <a:r>
+              <a:rPr lang="zh-CN" altLang="zh-CN" sz="2800" b="0" i="0" u="none">
+                <a:solidFill>
+                  <a:srgbClr val="000000"/>
+                </a:solidFill>
+                <a:effectLst/>
+                <a:latin typeface="Times New Roman" pitchFamily="28"/>
+                <a:ea typeface="宋体" pitchFamily="28"/>
+              </a:rPr>
+              <a:t>人造卫星在太空飞行</a:t>
+            </a:r>
+            <a:r>
+              <a:rPr lang="zh-CN" altLang="zh-CN" sz="2800" b="0" i="0" u="none">
+                <a:solidFill>
+                  <a:srgbClr val="000000"/>
+                </a:solidFill>
+                <a:effectLst/>
+                <a:latin typeface="宋体" pitchFamily="28"/>
+                <a:ea typeface="宋体" pitchFamily="28"/>
+              </a:rPr>
+              <a:t>，</a:t>
+            </a:r>
+            <a:r>
+              <a:rPr lang="zh-CN" altLang="zh-CN" sz="2800" b="0" i="0" u="none">
+                <a:solidFill>
+                  <a:srgbClr val="000000"/>
+                </a:solidFill>
+                <a:effectLst/>
+                <a:latin typeface="Times New Roman" pitchFamily="28"/>
+                <a:ea typeface="宋体" pitchFamily="28"/>
+                <a:sym typeface="_⨹_8_bd32c"/>
+              </a:rPr>
+              <a:t>主要靠太阳能电池</a:t>
+            </a:r>
+            <a:br>
+              <a:rPr lang="zh-CN" altLang="zh-CN" sz="2800" b="0" i="0" u="none">
+                <a:solidFill>
+                  <a:srgbClr val="000000"/>
+                </a:solidFill>
+                <a:effectLst/>
+                <a:latin typeface="Times New Roman" pitchFamily="28"/>
+                <a:ea typeface="宋体" pitchFamily="28"/>
+              </a:rPr>
+            </a:br>
+            <a:r>
+              <a:rPr lang="zh-CN" altLang="zh-CN" sz="2800" b="0" i="0" u="none">
+                <a:solidFill>
+                  <a:srgbClr val="000000"/>
+                </a:solidFill>
+                <a:effectLst/>
+                <a:latin typeface="Times New Roman" pitchFamily="28"/>
+                <a:ea typeface="宋体" pitchFamily="28"/>
+              </a:rPr>
+              <a:t>提供能量</a:t>
+            </a:r>
+            <a:r>
+              <a:rPr lang="zh-CN" altLang="zh-CN" sz="2800" b="0" i="0" u="none">
+                <a:solidFill>
+                  <a:srgbClr val="000000"/>
+                </a:solidFill>
+                <a:effectLst/>
+                <a:latin typeface="宋体" pitchFamily="28"/>
+                <a:ea typeface="宋体" pitchFamily="28"/>
+              </a:rPr>
+              <a:t>。</a:t>
+            </a:r>
+            <a:r>
+              <a:rPr lang="zh-CN" altLang="zh-CN" sz="2800" b="0" i="0" u="none">
+                <a:solidFill>
+                  <a:srgbClr val="000000"/>
+                </a:solidFill>
+                <a:effectLst/>
+                <a:latin typeface="Times New Roman" pitchFamily="28"/>
+                <a:ea typeface="宋体" pitchFamily="28"/>
+              </a:rPr>
+              <a:t>有一太阳能电池板</a:t>
+            </a:r>
+            <a:r>
+              <a:rPr lang="zh-CN" altLang="zh-CN" sz="2800" b="0" i="0" u="none">
+                <a:solidFill>
+                  <a:srgbClr val="000000"/>
+                </a:solidFill>
+                <a:effectLst/>
+                <a:latin typeface="宋体" pitchFamily="28"/>
+                <a:ea typeface="宋体" pitchFamily="28"/>
+              </a:rPr>
+              <a:t>，</a:t>
+            </a:r>
+            <a:r>
+              <a:rPr lang="zh-CN" altLang="zh-CN" sz="2800" b="0" i="0" u="none">
+                <a:solidFill>
+                  <a:srgbClr val="000000"/>
+                </a:solidFill>
+                <a:effectLst/>
+                <a:latin typeface="Times New Roman" pitchFamily="28"/>
+                <a:ea typeface="宋体" pitchFamily="28"/>
+              </a:rPr>
+              <a:t>测得它的开路电压为</a:t>
+            </a:r>
+            <a:r>
+              <a:rPr lang="en-US" altLang="zh-CN" sz="2800" b="0" i="0" u="none">
+                <a:solidFill>
+                  <a:srgbClr val="000000"/>
+                </a:solidFill>
+                <a:effectLst/>
+                <a:latin typeface="Times New Roman" pitchFamily="28"/>
+                <a:ea typeface="宋体" pitchFamily="28"/>
+              </a:rPr>
+              <a:t>800</a:t>
+            </a:r>
+            <a:r>
+              <a:rPr lang="zh-CN" altLang="zh-CN" sz="2800" b="0" i="0" u="none">
+                <a:solidFill>
+                  <a:srgbClr val="000000"/>
+                </a:solidFill>
+                <a:effectLst/>
+                <a:latin typeface="Times New Roman" pitchFamily="28"/>
+                <a:ea typeface="宋体" pitchFamily="28"/>
+              </a:rPr>
+              <a:t> </a:t>
+            </a:r>
+            <a:r>
+              <a:rPr lang="en-US" altLang="zh-CN" sz="2800" b="0" i="0" u="none">
+                <a:solidFill>
+                  <a:srgbClr val="000000"/>
+                </a:solidFill>
+                <a:effectLst/>
+                <a:latin typeface="Times New Roman" pitchFamily="28"/>
+                <a:ea typeface="宋体" pitchFamily="28"/>
+              </a:rPr>
+              <a:t>mV</a:t>
+            </a:r>
+            <a:r>
+              <a:rPr lang="zh-CN" altLang="zh-CN" sz="2800" b="0" i="0" u="none">
+                <a:solidFill>
+                  <a:srgbClr val="000000"/>
+                </a:solidFill>
+                <a:effectLst/>
+                <a:latin typeface="宋体" pitchFamily="28"/>
+                <a:ea typeface="宋体" pitchFamily="28"/>
+              </a:rPr>
+              <a:t>，</a:t>
+            </a:r>
+            <a:r>
+              <a:rPr lang="zh-CN" altLang="zh-CN" sz="2800" b="0" i="0" u="none">
+                <a:solidFill>
+                  <a:srgbClr val="000000"/>
+                </a:solidFill>
+                <a:effectLst/>
+                <a:latin typeface="Times New Roman" pitchFamily="28"/>
+                <a:ea typeface="宋体" pitchFamily="28"/>
+                <a:sym typeface="_⨹_5_c7107"/>
+              </a:rPr>
+              <a:t>短路电流为</a:t>
+            </a:r>
+            <a:br>
+              <a:rPr lang="zh-CN" altLang="zh-CN" sz="2800" b="0" i="0" u="none">
+                <a:solidFill>
+                  <a:srgbClr val="000000"/>
+                </a:solidFill>
+                <a:effectLst/>
+                <a:latin typeface="Times New Roman" pitchFamily="28"/>
+                <a:ea typeface="宋体" pitchFamily="28"/>
+              </a:rPr>
+            </a:br>
+            <a:r>
+              <a:rPr lang="en-US" altLang="zh-CN" sz="2800" b="0" i="0" u="none">
+                <a:solidFill>
+                  <a:srgbClr val="000000"/>
+                </a:solidFill>
+                <a:effectLst/>
+                <a:latin typeface="Times New Roman" pitchFamily="28"/>
+                <a:ea typeface="宋体" pitchFamily="28"/>
+              </a:rPr>
+              <a:t>40</a:t>
+            </a:r>
+            <a:r>
+              <a:rPr lang="zh-CN" altLang="zh-CN" sz="2800" b="0" i="0" u="none">
+                <a:solidFill>
+                  <a:srgbClr val="000000"/>
+                </a:solidFill>
+                <a:effectLst/>
+                <a:latin typeface="Times New Roman" pitchFamily="28"/>
+                <a:ea typeface="宋体" pitchFamily="28"/>
+              </a:rPr>
+              <a:t> </a:t>
+            </a:r>
+            <a:r>
+              <a:rPr lang="en-US" altLang="zh-CN" sz="2800" b="0" i="0" u="none">
+                <a:solidFill>
+                  <a:srgbClr val="000000"/>
+                </a:solidFill>
+                <a:effectLst/>
+                <a:latin typeface="Times New Roman" pitchFamily="28"/>
+                <a:ea typeface="宋体" pitchFamily="28"/>
+              </a:rPr>
+              <a:t>mA</a:t>
+            </a:r>
+            <a:r>
+              <a:rPr lang="zh-CN" altLang="zh-CN" sz="2800" b="0" i="0" u="none">
+                <a:solidFill>
+                  <a:srgbClr val="000000"/>
+                </a:solidFill>
+                <a:effectLst/>
+                <a:latin typeface="宋体" pitchFamily="28"/>
+                <a:ea typeface="宋体" pitchFamily="28"/>
+              </a:rPr>
+              <a:t>。</a:t>
+            </a:r>
+            <a:r>
+              <a:rPr lang="zh-CN" altLang="zh-CN" sz="2800" b="0" i="0" u="none">
+                <a:solidFill>
+                  <a:srgbClr val="000000"/>
+                </a:solidFill>
+                <a:effectLst/>
+                <a:latin typeface="Times New Roman" pitchFamily="28"/>
+                <a:ea typeface="宋体" pitchFamily="28"/>
+              </a:rPr>
+              <a:t>若将该电池板与一阻值为</a:t>
+            </a:r>
+            <a:r>
+              <a:rPr lang="en-US" altLang="zh-CN" sz="2800" b="0" i="0" u="none">
+                <a:solidFill>
+                  <a:srgbClr val="000000"/>
+                </a:solidFill>
+                <a:effectLst/>
+                <a:latin typeface="Times New Roman" pitchFamily="28"/>
+                <a:ea typeface="宋体" pitchFamily="28"/>
+              </a:rPr>
+              <a:t>20</a:t>
+            </a:r>
+            <a:r>
+              <a:rPr lang="zh-CN" altLang="zh-CN" sz="2800" b="0" i="0" u="none">
+                <a:solidFill>
+                  <a:srgbClr val="000000"/>
+                </a:solidFill>
+                <a:effectLst/>
+                <a:latin typeface="Times New Roman" pitchFamily="28"/>
+                <a:ea typeface="宋体" pitchFamily="28"/>
+              </a:rPr>
+              <a:t> </a:t>
+            </a:r>
+            <a:r>
+              <a:rPr lang="en-US" altLang="zh-CN" sz="2800" b="0" i="0" u="none">
+                <a:solidFill>
+                  <a:srgbClr val="000000"/>
+                </a:solidFill>
+                <a:effectLst/>
+                <a:latin typeface="Times New Roman" pitchFamily="28"/>
+                <a:ea typeface="宋体" pitchFamily="28"/>
+              </a:rPr>
+              <a:t>Ω</a:t>
+            </a:r>
+            <a:r>
+              <a:rPr lang="zh-CN" altLang="zh-CN" sz="2800" b="0" i="0" u="none">
+                <a:solidFill>
+                  <a:srgbClr val="000000"/>
+                </a:solidFill>
+                <a:effectLst/>
+                <a:latin typeface="Times New Roman" pitchFamily="28"/>
+                <a:ea typeface="宋体" pitchFamily="28"/>
+              </a:rPr>
+              <a:t>的电阻连成一闭合电路</a:t>
+            </a:r>
+            <a:r>
+              <a:rPr lang="zh-CN" altLang="zh-CN" sz="2800" b="0" i="0" u="none">
+                <a:solidFill>
+                  <a:srgbClr val="000000"/>
+                </a:solidFill>
+                <a:effectLst/>
+                <a:latin typeface="宋体" pitchFamily="28"/>
+                <a:ea typeface="宋体" pitchFamily="28"/>
+              </a:rPr>
+              <a:t>，</a:t>
+            </a:r>
+            <a:r>
+              <a:rPr lang="zh-CN" altLang="zh-CN" sz="2800" b="0" i="0" u="none">
+                <a:solidFill>
+                  <a:srgbClr val="000000"/>
+                </a:solidFill>
+                <a:effectLst/>
+                <a:latin typeface="Times New Roman" pitchFamily="28"/>
+                <a:ea typeface="宋体" pitchFamily="28"/>
+                <a:sym typeface="_⨹_4_51828"/>
+              </a:rPr>
+              <a:t>则路端电</a:t>
+            </a:r>
+            <a:br>
+              <a:rPr lang="zh-CN" altLang="zh-CN" sz="2800" b="0" i="0" u="none">
+                <a:solidFill>
+                  <a:srgbClr val="000000"/>
+                </a:solidFill>
+                <a:effectLst/>
+                <a:latin typeface="Times New Roman" pitchFamily="28"/>
+                <a:ea typeface="宋体" pitchFamily="28"/>
+              </a:rPr>
+            </a:br>
+            <a:r>
+              <a:rPr lang="zh-CN" altLang="zh-CN" sz="2800" b="0" i="0" u="none">
+                <a:solidFill>
+                  <a:srgbClr val="000000"/>
+                </a:solidFill>
+                <a:effectLst/>
+                <a:latin typeface="Times New Roman" pitchFamily="28"/>
+                <a:ea typeface="宋体" pitchFamily="28"/>
+              </a:rPr>
+              <a:t>压为</a:t>
+            </a:r>
+            <a:r>
+              <a:rPr lang="zh-CN" altLang="zh-CN" sz="2800" b="0" i="0" u="none">
+                <a:solidFill>
+                  <a:srgbClr val="000000"/>
+                </a:solidFill>
+                <a:effectLst/>
+                <a:latin typeface="宋体" pitchFamily="28"/>
+                <a:ea typeface="宋体" pitchFamily="28"/>
+              </a:rPr>
+              <a:t>（</a:t>
+            </a:r>
+            <a:r>
+              <a:rPr lang="zh-CN" altLang="zh-CN" sz="2800" b="0" i="1" u="none">
+                <a:solidFill>
+                  <a:srgbClr val="000000"/>
+                </a:solidFill>
+                <a:effectLst/>
+                <a:latin typeface="Times New Roman" pitchFamily="28"/>
+                <a:ea typeface="宋体" pitchFamily="28"/>
+              </a:rPr>
+              <a:t>　　</a:t>
+            </a:r>
+            <a:r>
+              <a:rPr lang="zh-CN" altLang="zh-CN" sz="2800" b="0" i="0" u="none">
+                <a:solidFill>
+                  <a:srgbClr val="000000"/>
+                </a:solidFill>
+                <a:effectLst/>
+                <a:latin typeface="宋体" pitchFamily="28"/>
+                <a:ea typeface="宋体" pitchFamily="28"/>
+              </a:rPr>
+              <a:t>）</a:t>
+            </a:r>
+          </a:p>
+        </p:txBody>
+      </p:sp>
+      <p:graphicFrame>
+        <p:nvGraphicFramePr>
+          <p:cNvPr id="16426" name="yt_table_16426" title="H_94.08">
+            <a:extLst>
+              <a:ext uri="{FF2B5EF4-FFF2-40B4-BE49-F238E27FC236}">
+                <a16:creationId xmlns:a16="http://schemas.microsoft.com/office/drawing/2014/main" id="{85F9CD91-DE56-4981-AD6D-3D4292DC4A24}"/>
+              </a:ext>
+            </a:extLst>
+          </p:cNvPr>
+          <p:cNvGraphicFramePr>
+            <a:graphicFrameLocks noGrp="1"/>
+          </p:cNvGraphicFramePr>
+          <p:nvPr/>
+        </p:nvGraphicFramePr>
+        <p:xfrm>
+          <a:off x="324066" y="2841539"/>
+          <a:ext cx="4919854" cy="1194816"/>
+        </p:xfrm>
+        <a:graphic>
+          <a:graphicData uri="http://schemas.openxmlformats.org/drawingml/2006/table">
+            <a:tbl>
+              <a:tblPr/>
+              <a:tblGrid>
+                <a:gridCol w="2926017">
+                  <a:extLst>
+                    <a:ext uri="{9D8B030D-6E8A-4147-A177-3AD203B41FA5}">
+                      <a16:colId xmlns:a16="http://schemas.microsoft.com/office/drawing/2014/main" val="10568"/>
+                    </a:ext>
+                  </a:extLst>
+                </a:gridCol>
+                <a:gridCol w="1993837">
+                  <a:extLst>
+                    <a:ext uri="{9D8B030D-6E8A-4147-A177-3AD203B41FA5}">
+                      <a16:colId xmlns:a16="http://schemas.microsoft.com/office/drawing/2014/main" val="10569"/>
+                    </a:ext>
+                  </a:extLst>
+                </a:gridCol>
+              </a:tblGrid>
+              <a:tr h="370840">
+                <a:tc>
+                  <a:txBody>
+                    <a:bodyPr/>
+                    <a:lstStyle/>
+                    <a:p>
+                      <a:pPr marL="523174" indent="-523174" algn="l" eaLnBrk="1" fontAlgn="ctr" latinLnBrk="0" hangingPunct="0">
+                        <a:lnSpc>
+                          <a:spcPct val="140000"/>
+                        </a:lnSpc>
+                      </a:pPr>
+                      <a:r>
+                        <a:rPr lang="en-US" altLang="zh-CN" sz="2800" b="0" i="0" u="none">
+                          <a:solidFill>
+                            <a:srgbClr val="000000"/>
+                          </a:solidFill>
+                          <a:effectLst/>
+                          <a:latin typeface="Times New Roman" pitchFamily="28"/>
+                          <a:ea typeface="宋体" pitchFamily="28"/>
+                        </a:rPr>
+                        <a:t>A</a:t>
+                      </a:r>
+                      <a:r>
+                        <a:rPr lang="en-US" altLang="zh-CN" sz="2800" b="0" i="0" u="none">
+                          <a:solidFill>
+                            <a:srgbClr val="000000"/>
+                          </a:solidFill>
+                          <a:effectLst/>
+                          <a:latin typeface="宋体" pitchFamily="28"/>
+                          <a:ea typeface="宋体" pitchFamily="28"/>
+                        </a:rPr>
+                        <a:t>.</a:t>
+                      </a:r>
+                      <a:r>
+                        <a:rPr lang="en-US" altLang="zh-CN" sz="2800" b="0" i="0" u="none">
+                          <a:solidFill>
+                            <a:srgbClr val="000000"/>
+                          </a:solidFill>
+                          <a:effectLst/>
+                          <a:latin typeface="Times New Roman" pitchFamily="28"/>
+                          <a:ea typeface="宋体" pitchFamily="28"/>
+                        </a:rPr>
+                        <a:t> 0</a:t>
+                      </a:r>
+                      <a:r>
+                        <a:rPr lang="en-US" altLang="zh-CN" sz="2800" b="0" i="0" u="none">
+                          <a:solidFill>
+                            <a:srgbClr val="000000"/>
+                          </a:solidFill>
+                          <a:effectLst/>
+                          <a:latin typeface="宋体" pitchFamily="28"/>
+                          <a:ea typeface="宋体" pitchFamily="28"/>
+                        </a:rPr>
+                        <a:t>.</a:t>
+                      </a:r>
+                      <a:r>
+                        <a:rPr lang="en-US" altLang="zh-CN" sz="2800" b="0" i="0" u="none">
+                          <a:solidFill>
+                            <a:srgbClr val="000000"/>
+                          </a:solidFill>
+                          <a:effectLst/>
+                          <a:latin typeface="Times New Roman" pitchFamily="28"/>
+                          <a:ea typeface="宋体" pitchFamily="28"/>
+                        </a:rPr>
+                        <a:t>1</a:t>
+                      </a:r>
+                      <a:r>
+                        <a:rPr lang="zh-CN" altLang="zh-CN" sz="2800" b="0" i="0" u="none">
+                          <a:solidFill>
+                            <a:srgbClr val="000000"/>
+                          </a:solidFill>
+                          <a:effectLst/>
+                          <a:latin typeface="Times New Roman" pitchFamily="28"/>
+                          <a:ea typeface="宋体" pitchFamily="28"/>
+                        </a:rPr>
+                        <a:t> </a:t>
+                      </a:r>
+                      <a:r>
+                        <a:rPr lang="en-US" altLang="zh-CN" sz="2800" b="0" i="0" u="none">
+                          <a:solidFill>
+                            <a:srgbClr val="000000"/>
+                          </a:solidFill>
+                          <a:effectLst/>
+                          <a:latin typeface="Times New Roman" pitchFamily="28"/>
+                          <a:ea typeface="宋体" pitchFamily="28"/>
+                        </a:rPr>
+                        <a:t>V</a:t>
+                      </a:r>
+                    </a:p>
+                  </a:txBody>
+                  <a:tcPr marL="0" marR="0" marT="0" marB="0" anchor="ctr">
+                    <a:lnL w="9522" cmpd="sng">
+                      <a:noFill/>
+                    </a:lnL>
+                    <a:lnR w="9522" cmpd="sng">
+                      <a:noFill/>
+                    </a:lnR>
+                    <a:lnT w="9522" cmpd="sng">
+                      <a:noFill/>
+                    </a:lnT>
+                    <a:lnB w="9522" cmpd="sng">
+                      <a:noFill/>
+                    </a:lnB>
+                  </a:tcPr>
+                </a:tc>
+                <a:tc>
+                  <a:txBody>
+                    <a:bodyPr/>
+                    <a:lstStyle/>
+                    <a:p>
+                      <a:pPr marL="523174" indent="-523174" algn="l" eaLnBrk="1" fontAlgn="ctr" latinLnBrk="0" hangingPunct="0">
+                        <a:lnSpc>
+                          <a:spcPct val="140000"/>
+                        </a:lnSpc>
+                      </a:pPr>
+                      <a:r>
+                        <a:rPr lang="en-US" altLang="zh-CN" sz="2800" b="0" i="0" u="none">
+                          <a:solidFill>
+                            <a:srgbClr val="000000"/>
+                          </a:solidFill>
+                          <a:effectLst/>
+                          <a:latin typeface="Times New Roman" pitchFamily="28"/>
+                          <a:ea typeface="宋体" pitchFamily="28"/>
+                        </a:rPr>
+                        <a:t>B</a:t>
+                      </a:r>
+                      <a:r>
+                        <a:rPr lang="en-US" altLang="zh-CN" sz="2800" b="0" i="0" u="none">
+                          <a:solidFill>
+                            <a:srgbClr val="000000"/>
+                          </a:solidFill>
+                          <a:effectLst/>
+                          <a:latin typeface="宋体" pitchFamily="28"/>
+                          <a:ea typeface="宋体" pitchFamily="28"/>
+                        </a:rPr>
+                        <a:t>.</a:t>
+                      </a:r>
+                      <a:r>
+                        <a:rPr lang="en-US" altLang="zh-CN" sz="2800" b="0" i="0" u="none">
+                          <a:solidFill>
+                            <a:srgbClr val="000000"/>
+                          </a:solidFill>
+                          <a:effectLst/>
+                          <a:latin typeface="Times New Roman" pitchFamily="28"/>
+                          <a:ea typeface="宋体" pitchFamily="28"/>
+                        </a:rPr>
+                        <a:t> 0</a:t>
+                      </a:r>
+                      <a:r>
+                        <a:rPr lang="en-US" altLang="zh-CN" sz="2800" b="0" i="0" u="none">
+                          <a:solidFill>
+                            <a:srgbClr val="000000"/>
+                          </a:solidFill>
+                          <a:effectLst/>
+                          <a:latin typeface="宋体" pitchFamily="28"/>
+                          <a:ea typeface="宋体" pitchFamily="28"/>
+                        </a:rPr>
+                        <a:t>.</a:t>
+                      </a:r>
+                      <a:r>
+                        <a:rPr lang="en-US" altLang="zh-CN" sz="2800" b="0" i="0" u="none">
+                          <a:solidFill>
+                            <a:srgbClr val="000000"/>
+                          </a:solidFill>
+                          <a:effectLst/>
+                          <a:latin typeface="Times New Roman" pitchFamily="28"/>
+                          <a:ea typeface="宋体" pitchFamily="28"/>
+                        </a:rPr>
+                        <a:t>2</a:t>
+                      </a:r>
+                      <a:r>
+                        <a:rPr lang="zh-CN" altLang="zh-CN" sz="2800" b="0" i="0" u="none">
+                          <a:solidFill>
+                            <a:srgbClr val="000000"/>
+                          </a:solidFill>
+                          <a:effectLst/>
+                          <a:latin typeface="Times New Roman" pitchFamily="28"/>
+                          <a:ea typeface="宋体" pitchFamily="28"/>
+                        </a:rPr>
+                        <a:t> </a:t>
+                      </a:r>
+                      <a:r>
+                        <a:rPr lang="en-US" altLang="zh-CN" sz="2800" b="0" i="0" u="none">
+                          <a:solidFill>
+                            <a:srgbClr val="000000"/>
+                          </a:solidFill>
+                          <a:effectLst/>
+                          <a:latin typeface="Times New Roman" pitchFamily="28"/>
+                          <a:ea typeface="宋体" pitchFamily="28"/>
+                        </a:rPr>
+                        <a:t>V</a:t>
+                      </a:r>
+                    </a:p>
+                  </a:txBody>
+                  <a:tcPr marL="0" marR="0" marT="0" marB="0" anchor="ctr">
+                    <a:lnL w="9522" cmpd="sng">
+                      <a:noFill/>
+                    </a:lnL>
+                    <a:lnR w="9522" cmpd="sng">
+                      <a:noFill/>
+                    </a:lnR>
+                    <a:lnT w="9522" cmpd="sng">
+                      <a:noFill/>
+                    </a:lnT>
+                    <a:lnB w="9522" cmpd="sng">
+                      <a:noFill/>
+                    </a:lnB>
+                  </a:tcPr>
+                </a:tc>
+                <a:extLst>
+                  <a:ext uri="{0D108BD9-81ED-4DB2-BD59-A6C34878D82A}">
+                    <a16:rowId xmlns:a16="http://schemas.microsoft.com/office/drawing/2014/main" val="11415"/>
+                  </a:ext>
+                </a:extLst>
+              </a:tr>
+              <a:tr h="370840">
+                <a:tc>
+                  <a:txBody>
+                    <a:bodyPr/>
+                    <a:lstStyle/>
+                    <a:p>
+                      <a:pPr marL="503492" indent="-503492" algn="l" eaLnBrk="1" fontAlgn="ctr" latinLnBrk="0" hangingPunct="0">
+                        <a:lnSpc>
+                          <a:spcPct val="140000"/>
+                        </a:lnSpc>
+                      </a:pPr>
+                      <a:r>
+                        <a:rPr lang="en-US" altLang="zh-CN" sz="2800" b="0" i="0" u="none">
+                          <a:solidFill>
+                            <a:srgbClr val="000000"/>
+                          </a:solidFill>
+                          <a:effectLst/>
+                          <a:latin typeface="Times New Roman" pitchFamily="28"/>
+                          <a:ea typeface="宋体" pitchFamily="28"/>
+                        </a:rPr>
+                        <a:t>C</a:t>
+                      </a:r>
+                      <a:r>
+                        <a:rPr lang="en-US" altLang="zh-CN" sz="2800" b="0" i="0" u="none">
+                          <a:solidFill>
+                            <a:srgbClr val="000000"/>
+                          </a:solidFill>
+                          <a:effectLst/>
+                          <a:latin typeface="宋体" pitchFamily="28"/>
+                          <a:ea typeface="宋体" pitchFamily="28"/>
+                        </a:rPr>
+                        <a:t>.</a:t>
+                      </a:r>
+                      <a:r>
+                        <a:rPr lang="en-US" altLang="zh-CN" sz="2800" b="0" i="0" u="none">
+                          <a:solidFill>
+                            <a:srgbClr val="000000"/>
+                          </a:solidFill>
+                          <a:effectLst/>
+                          <a:latin typeface="Times New Roman" pitchFamily="28"/>
+                          <a:ea typeface="宋体" pitchFamily="28"/>
+                        </a:rPr>
+                        <a:t> 0</a:t>
+                      </a:r>
+                      <a:r>
+                        <a:rPr lang="en-US" altLang="zh-CN" sz="2800" b="0" i="0" u="none">
+                          <a:solidFill>
+                            <a:srgbClr val="000000"/>
+                          </a:solidFill>
+                          <a:effectLst/>
+                          <a:latin typeface="宋体" pitchFamily="28"/>
+                          <a:ea typeface="宋体" pitchFamily="28"/>
+                        </a:rPr>
+                        <a:t>.</a:t>
+                      </a:r>
+                      <a:r>
+                        <a:rPr lang="en-US" altLang="zh-CN" sz="2800" b="0" i="0" u="none">
+                          <a:solidFill>
+                            <a:srgbClr val="000000"/>
+                          </a:solidFill>
+                          <a:effectLst/>
+                          <a:latin typeface="Times New Roman" pitchFamily="28"/>
+                          <a:ea typeface="宋体" pitchFamily="28"/>
+                        </a:rPr>
+                        <a:t>3</a:t>
+                      </a:r>
+                      <a:r>
+                        <a:rPr lang="zh-CN" altLang="zh-CN" sz="2800" b="0" i="0" u="none">
+                          <a:solidFill>
+                            <a:srgbClr val="000000"/>
+                          </a:solidFill>
+                          <a:effectLst/>
+                          <a:latin typeface="Times New Roman" pitchFamily="28"/>
+                          <a:ea typeface="宋体" pitchFamily="28"/>
+                        </a:rPr>
+                        <a:t> </a:t>
+                      </a:r>
+                      <a:r>
+                        <a:rPr lang="en-US" altLang="zh-CN" sz="2800" b="0" i="0" u="none">
+                          <a:solidFill>
+                            <a:srgbClr val="000000"/>
+                          </a:solidFill>
+                          <a:effectLst/>
+                          <a:latin typeface="Times New Roman" pitchFamily="28"/>
+                          <a:ea typeface="宋体" pitchFamily="28"/>
+                        </a:rPr>
+                        <a:t>V</a:t>
+                      </a:r>
+                    </a:p>
+                  </a:txBody>
+                  <a:tcPr marL="0" marR="0" marT="0" marB="0" anchor="ctr">
+                    <a:lnL w="9522" cmpd="sng">
+                      <a:noFill/>
+                    </a:lnL>
+                    <a:lnR w="9522" cmpd="sng">
+                      <a:noFill/>
+                    </a:lnR>
+                    <a:lnT w="9522" cmpd="sng">
+                      <a:noFill/>
+                    </a:lnT>
+                    <a:lnB w="9522" cmpd="sng">
+                      <a:noFill/>
+                    </a:lnB>
+                  </a:tcPr>
+                </a:tc>
+                <a:tc>
+                  <a:txBody>
+                    <a:bodyPr/>
+                    <a:lstStyle/>
+                    <a:p>
+                      <a:pPr marL="503492" indent="-503492" algn="l" eaLnBrk="1" fontAlgn="ctr" latinLnBrk="0" hangingPunct="0">
+                        <a:lnSpc>
+                          <a:spcPct val="140000"/>
+                        </a:lnSpc>
+                      </a:pPr>
+                      <a:r>
+                        <a:rPr lang="en-US" altLang="zh-CN" sz="2800" b="0" i="0" u="none">
+                          <a:solidFill>
+                            <a:srgbClr val="000000"/>
+                          </a:solidFill>
+                          <a:effectLst/>
+                          <a:latin typeface="Times New Roman" pitchFamily="28"/>
+                          <a:ea typeface="宋体" pitchFamily="28"/>
+                        </a:rPr>
+                        <a:t>D</a:t>
+                      </a:r>
+                      <a:r>
+                        <a:rPr lang="en-US" altLang="zh-CN" sz="2800" b="0" i="0" u="none">
+                          <a:solidFill>
+                            <a:srgbClr val="000000"/>
+                          </a:solidFill>
+                          <a:effectLst/>
+                          <a:latin typeface="宋体" pitchFamily="28"/>
+                          <a:ea typeface="宋体" pitchFamily="28"/>
+                        </a:rPr>
+                        <a:t>.</a:t>
+                      </a:r>
+                      <a:r>
+                        <a:rPr lang="en-US" altLang="zh-CN" sz="2800" b="0" i="0" u="none">
+                          <a:solidFill>
+                            <a:srgbClr val="000000"/>
+                          </a:solidFill>
+                          <a:effectLst/>
+                          <a:latin typeface="Times New Roman" pitchFamily="28"/>
+                          <a:ea typeface="宋体" pitchFamily="28"/>
+                        </a:rPr>
+                        <a:t> 0</a:t>
+                      </a:r>
+                      <a:r>
+                        <a:rPr lang="en-US" altLang="zh-CN" sz="2800" b="0" i="0" u="none">
+                          <a:solidFill>
+                            <a:srgbClr val="000000"/>
+                          </a:solidFill>
+                          <a:effectLst/>
+                          <a:latin typeface="宋体" pitchFamily="28"/>
+                          <a:ea typeface="宋体" pitchFamily="28"/>
+                        </a:rPr>
+                        <a:t>.</a:t>
+                      </a:r>
+                      <a:r>
+                        <a:rPr lang="en-US" altLang="zh-CN" sz="2800" b="0" i="0" u="none">
+                          <a:solidFill>
+                            <a:srgbClr val="000000"/>
+                          </a:solidFill>
+                          <a:effectLst/>
+                          <a:latin typeface="Times New Roman" pitchFamily="28"/>
+                          <a:ea typeface="宋体" pitchFamily="28"/>
+                        </a:rPr>
+                        <a:t>4</a:t>
+                      </a:r>
+                      <a:r>
+                        <a:rPr lang="zh-CN" altLang="zh-CN" sz="2800" b="0" i="0" u="none">
+                          <a:solidFill>
+                            <a:srgbClr val="000000"/>
+                          </a:solidFill>
+                          <a:effectLst/>
+                          <a:latin typeface="Times New Roman" pitchFamily="28"/>
+                          <a:ea typeface="宋体" pitchFamily="28"/>
+                        </a:rPr>
+                        <a:t> </a:t>
+                      </a:r>
+                      <a:r>
+                        <a:rPr lang="en-US" altLang="zh-CN" sz="2800" b="0" i="0" u="none">
+                          <a:solidFill>
+                            <a:srgbClr val="000000"/>
+                          </a:solidFill>
+                          <a:effectLst/>
+                          <a:latin typeface="Times New Roman" pitchFamily="28"/>
+                          <a:ea typeface="宋体" pitchFamily="28"/>
+                        </a:rPr>
+                        <a:t>V</a:t>
+                      </a:r>
+                    </a:p>
+                  </a:txBody>
+                  <a:tcPr marL="0" marR="0" marT="0" marB="0" anchor="ctr">
+                    <a:lnL w="9522" cmpd="sng">
+                      <a:noFill/>
+                    </a:lnL>
+                    <a:lnR w="9522" cmpd="sng">
+                      <a:noFill/>
+                    </a:lnR>
+                    <a:lnT w="9522" cmpd="sng">
+                      <a:noFill/>
+                    </a:lnT>
+                    <a:lnB w="9522" cmpd="sng">
+                      <a:noFill/>
+                    </a:lnB>
+                  </a:tcPr>
+                </a:tc>
+                <a:extLst>
+                  <a:ext uri="{0D108BD9-81ED-4DB2-BD59-A6C34878D82A}">
+                    <a16:rowId xmlns:a16="http://schemas.microsoft.com/office/drawing/2014/main" val="11416"/>
+                  </a:ext>
+                </a:extLst>
+              </a:tr>
+            </a:tbl>
+          </a:graphicData>
+        </a:graphic>
+      </p:graphicFrame>
+      <p:sp>
+        <p:nvSpPr>
+          <p:cNvPr id="5" name="矩形 4"/>
+          <p:cNvSpPr/>
+          <p:nvPr/>
+        </p:nvSpPr>
+        <p:spPr>
+          <a:xfrm>
+            <a:off x="2969377" y="3493929"/>
+            <a:ext cx="761669" cy="861774"/>
+          </a:xfrm>
+          <a:prstGeom prst="rect">
+            <a:avLst/>
+          </a:prstGeom>
+        </p:spPr>
+        <p:txBody>
+          <a:bodyPr wrap="square">
+            <a:spAutoFit/>
+          </a:bodyPr>
+          <a:lstStyle/>
+          <a:p>
+            <a:r>
+              <a:rPr lang="en-US" altLang="zh-CN" sz="5000" b="1" dirty="0">
+                <a:solidFill>
+                  <a:srgbClr val="C00000"/>
+                </a:solidFill>
+                <a:latin typeface="华文细黑" panose="02010600040101010101" pitchFamily="2" charset="-122"/>
+                <a:ea typeface="华文细黑" panose="02010600040101010101" pitchFamily="2" charset="-122"/>
+              </a:rPr>
+              <a:t>√  </a:t>
+            </a:r>
+            <a:endParaRPr lang="zh-CN" altLang="en-US" sz="5000" b="1" dirty="0">
+              <a:solidFill>
+                <a:srgbClr val="C00000"/>
+              </a:solidFill>
+              <a:latin typeface="华文细黑" panose="02010600040101010101" pitchFamily="2" charset="-122"/>
+              <a:ea typeface="华文细黑" panose="02010600040101010101" pitchFamily="2" charset="-122"/>
+            </a:endParaRPr>
+          </a:p>
+        </p:txBody>
+      </p:sp>
+    </p:spTree>
+  </p:cSld>
+  <p:clrMapOvr>
+    <a:masterClrMapping/>
+  </p:clrMapOvr>
+  <mc:AlternateContent xmlns:mc="http://schemas.openxmlformats.org/markup-compatibility/2006" xmlns:p15="http://schemas.microsoft.com/office/powerpoint/2012/main">
+    <mc:Choice Requires="p15">
+      <p:transition xmlns:p14="http://schemas.microsoft.com/office/powerpoint/2010/main" spd="slow" p14:dur="1250">
+        <p15:prstTrans prst="pageCurlDouble"/>
+      </p:transition>
+    </mc:Choice>
+    <mc:Fallback xmlns="" xmlns:a14="http://schemas.microsoft.com/office/drawing/2010/main" xmlns:a16="http://schemas.microsoft.com/office/drawing/2014/main" xmlns:p14="http://schemas.microsoft.com/office/powerpoint/2010/main">
+      <p:transition spd="slow">
+        <p:fade/>
+      </p:transition>
+    </mc:Fallback>
+  </mc:AlternateContent>
+  <p:timing>
+    <p:tnLst>
+      <p:par>
+        <p:cTn id="1" dur="indefinite" restart="never" nodeType="tmRoot">
+          <p:childTnLst>
+            <p:seq concurrent="1" nextAc="seek">
+              <p:cTn id="2" dur="indefinite" nodeType="mainSeq">
+                <p:childTnLst>
+                  <p:par>
+                    <p:cTn id="3" fill="hold">
+                      <p:stCondLst>
+                        <p:cond delay="indefinite"/>
+                      </p:stCondLst>
+                      <p:childTnLst>
+                        <p:par>
+                          <p:cTn id="4" fill="hold">
+                            <p:stCondLst>
+                              <p:cond delay="0"/>
+                            </p:stCondLst>
+                            <p:childTnLst>
+                              <p:par>
+                                <p:cTn id="5" presetID="2" presetClass="entr" presetSubtype="4" fill="hold" grpId="0" nodeType="clickEffect">
+                                  <p:stCondLst>
+                                    <p:cond delay="0"/>
+                                  </p:stCondLst>
+                                  <p:childTnLst>
+                                    <p:set>
+                                      <p:cBhvr>
+                                        <p:cTn id="6" dur="1" fill="hold">
+                                          <p:stCondLst>
+                                            <p:cond delay="0"/>
+                                          </p:stCondLst>
+                                        </p:cTn>
+                                        <p:tgtEl>
+                                          <p:spTgt spid="5"/>
+                                        </p:tgtEl>
+                                        <p:attrNameLst>
+                                          <p:attrName>style.visibility</p:attrName>
+                                        </p:attrNameLst>
+                                      </p:cBhvr>
+                                      <p:to>
+                                        <p:strVal val="visible"/>
+                                      </p:to>
+                                    </p:set>
+                                    <p:anim calcmode="lin" valueType="num">
+                                      <p:cBhvr additive="base">
+                                        <p:cTn id="7" dur="500" fill="hold"/>
+                                        <p:tgtEl>
+                                          <p:spTgt spid="5"/>
+                                        </p:tgtEl>
+                                        <p:attrNameLst>
+                                          <p:attrName>ppt_x</p:attrName>
+                                        </p:attrNameLst>
+                                      </p:cBhvr>
+                                      <p:tavLst>
+                                        <p:tav tm="0">
+                                          <p:val>
+                                            <p:strVal val="#ppt_x"/>
+                                          </p:val>
+                                        </p:tav>
+                                        <p:tav tm="100000">
+                                          <p:val>
+                                            <p:strVal val="#ppt_x"/>
+                                          </p:val>
+                                        </p:tav>
+                                      </p:tavLst>
+                                    </p:anim>
+                                    <p:anim calcmode="lin" valueType="num">
+                                      <p:cBhvr additive="base">
+                                        <p:cTn id="8" dur="500" fill="hold"/>
+                                        <p:tgtEl>
+                                          <p:spTgt spid="5"/>
+                                        </p:tgtEl>
+                                        <p:attrNameLst>
+                                          <p:attrName>ppt_y</p:attrName>
+                                        </p:attrNameLst>
+                                      </p:cBhvr>
+                                      <p:tavLst>
+                                        <p:tav tm="0">
+                                          <p:val>
+                                            <p:strVal val="1+#ppt_h/2"/>
+                                          </p:val>
+                                        </p:tav>
+                                        <p:tav tm="100000">
+                                          <p:val>
+                                            <p:strVal val="#ppt_y"/>
+                                          </p:val>
+                                        </p:tav>
+                                      </p:tavLst>
+                                    </p:anim>
+                                  </p:childTnLst>
+                                </p:cTn>
+                              </p:par>
+                            </p:childTnLst>
+                          </p:cTn>
+                        </p:par>
+                      </p:childTnLst>
+                    </p:cTn>
+                  </p:par>
+                </p:childTnLst>
+              </p:cTn>
+              <p:prevCondLst>
+                <p:cond evt="onPrev" delay="0">
+                  <p:tgtEl>
+                    <p:sldTgt/>
+                  </p:tgtEl>
+                </p:cond>
+              </p:prevCondLst>
+              <p:nextCondLst>
+                <p:cond evt="onNext" delay="0">
+                  <p:tgtEl>
+                    <p:sldTgt/>
+                  </p:tgtEl>
+                </p:cond>
+              </p:nextCondLst>
+            </p:seq>
+          </p:childTnLst>
+        </p:cTn>
+      </p:par>
+    </p:tnLst>
+    <p:bldLst>
+      <p:bldP spid="5" grpId="0"/>
+    </p:bldLst>
+  </p:timing>
+</p:sld>
+</file>
+
 <file path=ppt/slides/slide2.xml><?xml version="1.0" encoding="utf-8"?>
+<p:sld xmlns:a="http://schemas.openxmlformats.org/drawingml/2006/main" xmlns:r="http://schemas.openxmlformats.org/officeDocument/2006/relationships" xmlns:p="http://schemas.openxmlformats.org/presentationml/2006/main">
+  <p:cSld>
+    <p:spTree>
+      <p:nvGrpSpPr>
+        <p:cNvPr id="1" name=""/>
+        <p:cNvGrpSpPr/>
+        <p:nvPr/>
+      </p:nvGrpSpPr>
+      <p:grpSpPr>
+        <a:xfrm>
+          <a:off x="0" y="0"/>
+          <a:ext cx="0" cy="0"/>
+          <a:chOff x="0" y="0"/>
+          <a:chExt cx="0" cy="0"/>
+        </a:xfrm>
+      </p:grpSpPr>
+      <p:pic>
+        <p:nvPicPr>
+          <p:cNvPr id="3" name="Content Placeholder 2" descr="A City in Switzerland Where People Practically Swim Home from Work, In  parts of Switzerland, the journey home doesn’t involve traffic or trains.  In cities like Bern, locals swim or float home from ...">
+            <a:extLst>
+              <a:ext uri="{FF2B5EF4-FFF2-40B4-BE49-F238E27FC236}">
+                <a16:creationId xmlns:a16="http://schemas.microsoft.com/office/drawing/2014/main" id="{610A19E6-F361-8749-248C-32ADF04576A4}"/>
+              </a:ext>
+            </a:extLst>
+          </p:cNvPr>
+          <p:cNvPicPr>
+            <a:picLocks noGrp="1" noChangeAspect="1"/>
+          </p:cNvPicPr>
+          <p:nvPr>
+            <p:ph idx="1"/>
+          </p:nvPr>
+        </p:nvPicPr>
+        <p:blipFill>
+          <a:blip r:embed="rId2"/>
+          <a:stretch>
+            <a:fillRect/>
+          </a:stretch>
+        </p:blipFill>
+        <p:spPr>
+          <a:xfrm>
+            <a:off x="4463678" y="522288"/>
+            <a:ext cx="3264643" cy="5813425"/>
+          </a:xfrm>
+          <a:prstGeom prst="rect">
+            <a:avLst/>
+          </a:prstGeom>
+        </p:spPr>
+      </p:pic>
+    </p:spTree>
+    <p:extLst>
+      <p:ext uri="{BB962C8B-B14F-4D97-AF65-F5344CB8AC3E}">
+        <p14:creationId xmlns:p14="http://schemas.microsoft.com/office/powerpoint/2010/main" val="852652772"/>
+      </p:ext>
+    </p:extLst>
+  </p:cSld>
+  <p:clrMapOvr>
+    <a:masterClrMapping/>
+  </p:clrMapOvr>
+</p:sld>
+</file>
+
+<file path=ppt/slides/slide3.xml><?xml version="1.0" encoding="utf-8"?>
 <p:sld xmlns:a="http://schemas.openxmlformats.org/drawingml/2006/main" xmlns:r="http://schemas.openxmlformats.org/officeDocument/2006/relationships" xmlns:p="http://schemas.openxmlformats.org/presentationml/2006/main">
   <p:cSld>
     <p:spTree>
@@ -2430,7 +3603,7 @@
 </p:sld>
 </file>
 
-<file path=ppt/slides/slide3.xml><?xml version="1.0" encoding="utf-8"?>
+<file path=ppt/slides/slide4.xml><?xml version="1.0" encoding="utf-8"?>
 <p:sld xmlns:a="http://schemas.openxmlformats.org/drawingml/2006/main" xmlns:r="http://schemas.openxmlformats.org/officeDocument/2006/relationships" xmlns:p="http://schemas.openxmlformats.org/presentationml/2006/main">
   <p:cSld>
     <p:spTree>
@@ -2554,7 +3727,7 @@
 </p:sld>
 </file>
 
-<file path=ppt/slides/slide4.xml><?xml version="1.0" encoding="utf-8"?>
+<file path=ppt/slides/slide5.xml><?xml version="1.0" encoding="utf-8"?>
 <p:sld xmlns:a="http://schemas.openxmlformats.org/drawingml/2006/main" xmlns:r="http://schemas.openxmlformats.org/officeDocument/2006/relationships" xmlns:p="http://schemas.openxmlformats.org/presentationml/2006/main">
   <p:cSld>
     <p:spTree>
@@ -2759,7 +3932,7 @@
 </p:sld>
 </file>
 
-<file path=ppt/slides/slide5.xml><?xml version="1.0" encoding="utf-8"?>
+<file path=ppt/slides/slide6.xml><?xml version="1.0" encoding="utf-8"?>
 <p:sld xmlns:a="http://schemas.openxmlformats.org/drawingml/2006/main" xmlns:r="http://schemas.openxmlformats.org/officeDocument/2006/relationships" xmlns:p="http://schemas.openxmlformats.org/presentationml/2006/main">
   <p:cSld>
     <p:spTree>
@@ -2932,7 +4105,7 @@
 </p:sld>
 </file>
 
-<file path=ppt/slides/slide6.xml><?xml version="1.0" encoding="utf-8"?>
+<file path=ppt/slides/slide7.xml><?xml version="1.0" encoding="utf-8"?>
 <p:sld xmlns:a="http://schemas.openxmlformats.org/drawingml/2006/main" xmlns:r="http://schemas.openxmlformats.org/officeDocument/2006/relationships" xmlns:p="http://schemas.openxmlformats.org/presentationml/2006/main">
   <p:cSld>
     <p:spTree>
@@ -3940,7 +5113,7 @@
         <p14:prism/>
       </p:transition>
     </mc:Choice>
-    <mc:Fallback xmlns:a14="http://schemas.microsoft.com/office/drawing/2010/main" xmlns:a16="http://schemas.microsoft.com/office/drawing/2014/main" xmlns="">
+    <mc:Fallback xmlns="" xmlns:a16="http://schemas.microsoft.com/office/drawing/2014/main" xmlns:a14="http://schemas.microsoft.com/office/drawing/2010/main">
       <p:transition spd="slow">
         <p:fade/>
       </p:transition>
@@ -4032,7 +5205,7 @@
 </p:sld>
 </file>
 
-<file path=ppt/slides/slide7.xml><?xml version="1.0" encoding="utf-8"?>
+<file path=ppt/slides/slide8.xml><?xml version="1.0" encoding="utf-8"?>
 <p:sld xmlns:a="http://schemas.openxmlformats.org/drawingml/2006/main" xmlns:r="http://schemas.openxmlformats.org/officeDocument/2006/relationships" xmlns:p="http://schemas.openxmlformats.org/presentationml/2006/main">
   <p:cSld>
     <p:spTree>
@@ -4435,7 +5608,7 @@
           <p:cNvPr id="16449" name="yt_image_16449" title="H_191.37495">
             <a:extLst>
               <a:ext uri="">
-                <a16:creationId xmlns:a16="http://schemas.microsoft.com/office/drawing/2014/main" xmlns:p15="http://schemas.microsoft.com/office/powerpoint/2012/main" xmlns:mc="http://schemas.openxmlformats.org/markup-compatibility/2006" xmlns:p14="http://schemas.microsoft.com/office/powerpoint/2010/main" xmlns:a14="http://schemas.microsoft.com/office/drawing/2010/main" xmlns="" id="{5351258F-BC95-41E6-9372-C2FE361B0291}"/>
+                <a16:creationId xmlns="" xmlns:a14="http://schemas.microsoft.com/office/drawing/2010/main" xmlns:p14="http://schemas.microsoft.com/office/powerpoint/2010/main" xmlns:mc="http://schemas.openxmlformats.org/markup-compatibility/2006" xmlns:p15="http://schemas.microsoft.com/office/powerpoint/2012/main" xmlns:a16="http://schemas.microsoft.com/office/drawing/2014/main" id="{5351258F-BC95-41E6-9372-C2FE361B0291}"/>
               </a:ext>
             </a:extLst>
           </p:cNvPr>
@@ -5553,7 +6726,7 @@
 </p:sld>
 </file>
 
-<file path=ppt/slides/slide8.xml><?xml version="1.0" encoding="utf-8"?>
+<file path=ppt/slides/slide9.xml><?xml version="1.0" encoding="utf-8"?>
 <p:sld xmlns:a="http://schemas.openxmlformats.org/drawingml/2006/main" xmlns:r="http://schemas.openxmlformats.org/officeDocument/2006/relationships" xmlns:p="http://schemas.openxmlformats.org/presentationml/2006/main">
   <p:cSld>
     <p:spTree>
@@ -7110,7 +8283,7 @@
         <p15:prstTrans prst="pageCurlDouble"/>
       </p:transition>
     </mc:Choice>
-    <mc:Fallback xmlns:p14="http://schemas.microsoft.com/office/powerpoint/2010/main" xmlns:a16="http://schemas.microsoft.com/office/drawing/2014/main" xmlns:a14="http://schemas.microsoft.com/office/drawing/2010/main" xmlns="">
+    <mc:Fallback xmlns="" xmlns:a14="http://schemas.microsoft.com/office/drawing/2010/main" xmlns:a16="http://schemas.microsoft.com/office/drawing/2014/main" xmlns:p14="http://schemas.microsoft.com/office/powerpoint/2010/main">
       <p:transition spd="slow">
         <p:fade/>
       </p:transition>
@@ -7300,1116 +8473,6 @@
     <p:bldLst>
       <p:bldP spid="16424" grpId="0" build="allAtOnce"/>
       <p:bldP spid="6" grpId="0"/>
-    </p:bldLst>
-  </p:timing>
-</p:sld>
-</file>
-
-<file path=ppt/slides/slide9.xml><?xml version="1.0" encoding="utf-8"?>
-<p:sld xmlns:a="http://schemas.openxmlformats.org/drawingml/2006/main" xmlns:r="http://schemas.openxmlformats.org/officeDocument/2006/relationships" xmlns:p="http://schemas.openxmlformats.org/presentationml/2006/main">
-  <p:cSld>
-    <p:spTree>
-      <p:nvGrpSpPr>
-        <p:cNvPr id="1" name="YT"/>
-        <p:cNvGrpSpPr/>
-        <p:nvPr/>
-      </p:nvGrpSpPr>
-      <p:grpSpPr>
-        <a:xfrm>
-          <a:off x="0" y="0"/>
-          <a:ext cx="0" cy="0"/>
-          <a:chOff x="0" y="0"/>
-          <a:chExt cx="0" cy="0"/>
-        </a:xfrm>
-      </p:grpSpPr>
-      <p:sp>
-        <p:nvSpPr>
-          <p:cNvPr id="16425" name="yt_shape_16425"/>
-          <p:cNvSpPr txBox="1"/>
-          <p:nvPr/>
-        </p:nvSpPr>
-        <p:spPr>
-          <a:xfrm>
-            <a:off x="324071" y="467999"/>
-            <a:ext cx="11924914" cy="2322752"/>
-          </a:xfrm>
-          <a:prstGeom prst="rect">
-            <a:avLst/>
-          </a:prstGeom>
-        </p:spPr>
-        <p:txBody>
-          <a:bodyPr vert="horz" wrap="square" lIns="0" tIns="0" rIns="0" bIns="0" rtlCol="0">
-            <a:noAutofit/>
-          </a:bodyPr>
-          <a:lstStyle/>
-          <a:p>
-            <a:pPr algn="l" eaLnBrk="1" latinLnBrk="0" hangingPunct="0">
-              <a:lnSpc>
-                <a:spcPct val="140000"/>
-              </a:lnSpc>
-            </a:pPr>
-            <a:r>
-              <a:rPr lang="zh-CN" altLang="zh-CN" sz="2800" b="1" i="0" u="none">
-                <a:solidFill>
-                  <a:srgbClr val="000000"/>
-                </a:solidFill>
-                <a:effectLst/>
-                <a:latin typeface="Times New Roman" pitchFamily="28"/>
-                <a:ea typeface="微软雅黑" pitchFamily="28"/>
-              </a:rPr>
-              <a:t>【例</a:t>
-            </a:r>
-            <a:r>
-              <a:rPr lang="en-US" altLang="zh-CN" sz="2800" b="1" i="0" u="none">
-                <a:solidFill>
-                  <a:srgbClr val="000000"/>
-                </a:solidFill>
-                <a:effectLst/>
-                <a:latin typeface="Times New Roman" pitchFamily="28"/>
-                <a:ea typeface="微软雅黑" pitchFamily="28"/>
-              </a:rPr>
-              <a:t>2</a:t>
-            </a:r>
-            <a:r>
-              <a:rPr lang="zh-CN" altLang="zh-CN" sz="2800" b="1" i="0" u="none">
-                <a:solidFill>
-                  <a:srgbClr val="000000"/>
-                </a:solidFill>
-                <a:effectLst/>
-                <a:latin typeface="Times New Roman" pitchFamily="28"/>
-                <a:ea typeface="微软雅黑" pitchFamily="28"/>
-              </a:rPr>
-              <a:t>】　</a:t>
-            </a:r>
-            <a:r>
-              <a:rPr lang="zh-CN" altLang="zh-CN" sz="2800" b="0" i="0" u="none">
-                <a:solidFill>
-                  <a:srgbClr val="000000"/>
-                </a:solidFill>
-                <a:effectLst/>
-                <a:latin typeface="宋体" pitchFamily="28"/>
-                <a:ea typeface="宋体" pitchFamily="28"/>
-              </a:rPr>
-              <a:t>（</a:t>
-            </a:r>
-            <a:r>
-              <a:rPr lang="zh-CN" altLang="zh-CN" sz="2800" b="0" i="0" u="none">
-                <a:solidFill>
-                  <a:srgbClr val="000000"/>
-                </a:solidFill>
-                <a:effectLst/>
-                <a:latin typeface="Times New Roman" pitchFamily="28"/>
-                <a:ea typeface="楷体" pitchFamily="28"/>
-              </a:rPr>
-              <a:t>路端电压的计算</a:t>
-            </a:r>
-            <a:r>
-              <a:rPr lang="zh-CN" altLang="zh-CN" sz="2800" b="0" i="0" u="none">
-                <a:solidFill>
-                  <a:srgbClr val="000000"/>
-                </a:solidFill>
-                <a:effectLst/>
-                <a:latin typeface="宋体" pitchFamily="28"/>
-                <a:ea typeface="宋体" pitchFamily="28"/>
-              </a:rPr>
-              <a:t>）</a:t>
-            </a:r>
-            <a:r>
-              <a:rPr lang="zh-CN" altLang="zh-CN" sz="2800" b="0" i="0" u="none">
-                <a:solidFill>
-                  <a:srgbClr val="000000"/>
-                </a:solidFill>
-                <a:effectLst/>
-                <a:latin typeface="Times New Roman" pitchFamily="28"/>
-                <a:ea typeface="宋体" pitchFamily="28"/>
-              </a:rPr>
-              <a:t>人造卫星在太空飞行</a:t>
-            </a:r>
-            <a:r>
-              <a:rPr lang="zh-CN" altLang="zh-CN" sz="2800" b="0" i="0" u="none">
-                <a:solidFill>
-                  <a:srgbClr val="000000"/>
-                </a:solidFill>
-                <a:effectLst/>
-                <a:latin typeface="宋体" pitchFamily="28"/>
-                <a:ea typeface="宋体" pitchFamily="28"/>
-              </a:rPr>
-              <a:t>，</a:t>
-            </a:r>
-            <a:r>
-              <a:rPr lang="zh-CN" altLang="zh-CN" sz="2800" b="0" i="0" u="none">
-                <a:solidFill>
-                  <a:srgbClr val="000000"/>
-                </a:solidFill>
-                <a:effectLst/>
-                <a:latin typeface="Times New Roman" pitchFamily="28"/>
-                <a:ea typeface="宋体" pitchFamily="28"/>
-                <a:sym typeface="_⨹_8_bd32c"/>
-              </a:rPr>
-              <a:t>主要靠太阳能电池</a:t>
-            </a:r>
-            <a:br>
-              <a:rPr lang="zh-CN" altLang="zh-CN" sz="2800" b="0" i="0" u="none">
-                <a:solidFill>
-                  <a:srgbClr val="000000"/>
-                </a:solidFill>
-                <a:effectLst/>
-                <a:latin typeface="Times New Roman" pitchFamily="28"/>
-                <a:ea typeface="宋体" pitchFamily="28"/>
-              </a:rPr>
-            </a:br>
-            <a:r>
-              <a:rPr lang="zh-CN" altLang="zh-CN" sz="2800" b="0" i="0" u="none">
-                <a:solidFill>
-                  <a:srgbClr val="000000"/>
-                </a:solidFill>
-                <a:effectLst/>
-                <a:latin typeface="Times New Roman" pitchFamily="28"/>
-                <a:ea typeface="宋体" pitchFamily="28"/>
-              </a:rPr>
-              <a:t>提供能量</a:t>
-            </a:r>
-            <a:r>
-              <a:rPr lang="zh-CN" altLang="zh-CN" sz="2800" b="0" i="0" u="none">
-                <a:solidFill>
-                  <a:srgbClr val="000000"/>
-                </a:solidFill>
-                <a:effectLst/>
-                <a:latin typeface="宋体" pitchFamily="28"/>
-                <a:ea typeface="宋体" pitchFamily="28"/>
-              </a:rPr>
-              <a:t>。</a:t>
-            </a:r>
-            <a:r>
-              <a:rPr lang="zh-CN" altLang="zh-CN" sz="2800" b="0" i="0" u="none">
-                <a:solidFill>
-                  <a:srgbClr val="000000"/>
-                </a:solidFill>
-                <a:effectLst/>
-                <a:latin typeface="Times New Roman" pitchFamily="28"/>
-                <a:ea typeface="宋体" pitchFamily="28"/>
-              </a:rPr>
-              <a:t>有一太阳能电池板</a:t>
-            </a:r>
-            <a:r>
-              <a:rPr lang="zh-CN" altLang="zh-CN" sz="2800" b="0" i="0" u="none">
-                <a:solidFill>
-                  <a:srgbClr val="000000"/>
-                </a:solidFill>
-                <a:effectLst/>
-                <a:latin typeface="宋体" pitchFamily="28"/>
-                <a:ea typeface="宋体" pitchFamily="28"/>
-              </a:rPr>
-              <a:t>，</a:t>
-            </a:r>
-            <a:r>
-              <a:rPr lang="zh-CN" altLang="zh-CN" sz="2800" b="0" i="0" u="none">
-                <a:solidFill>
-                  <a:srgbClr val="000000"/>
-                </a:solidFill>
-                <a:effectLst/>
-                <a:latin typeface="Times New Roman" pitchFamily="28"/>
-                <a:ea typeface="宋体" pitchFamily="28"/>
-              </a:rPr>
-              <a:t>测得它的开路电压为</a:t>
-            </a:r>
-            <a:r>
-              <a:rPr lang="en-US" altLang="zh-CN" sz="2800" b="0" i="0" u="none">
-                <a:solidFill>
-                  <a:srgbClr val="000000"/>
-                </a:solidFill>
-                <a:effectLst/>
-                <a:latin typeface="Times New Roman" pitchFamily="28"/>
-                <a:ea typeface="宋体" pitchFamily="28"/>
-              </a:rPr>
-              <a:t>800</a:t>
-            </a:r>
-            <a:r>
-              <a:rPr lang="zh-CN" altLang="zh-CN" sz="2800" b="0" i="0" u="none">
-                <a:solidFill>
-                  <a:srgbClr val="000000"/>
-                </a:solidFill>
-                <a:effectLst/>
-                <a:latin typeface="Times New Roman" pitchFamily="28"/>
-                <a:ea typeface="宋体" pitchFamily="28"/>
-              </a:rPr>
-              <a:t> </a:t>
-            </a:r>
-            <a:r>
-              <a:rPr lang="en-US" altLang="zh-CN" sz="2800" b="0" i="0" u="none">
-                <a:solidFill>
-                  <a:srgbClr val="000000"/>
-                </a:solidFill>
-                <a:effectLst/>
-                <a:latin typeface="Times New Roman" pitchFamily="28"/>
-                <a:ea typeface="宋体" pitchFamily="28"/>
-              </a:rPr>
-              <a:t>mV</a:t>
-            </a:r>
-            <a:r>
-              <a:rPr lang="zh-CN" altLang="zh-CN" sz="2800" b="0" i="0" u="none">
-                <a:solidFill>
-                  <a:srgbClr val="000000"/>
-                </a:solidFill>
-                <a:effectLst/>
-                <a:latin typeface="宋体" pitchFamily="28"/>
-                <a:ea typeface="宋体" pitchFamily="28"/>
-              </a:rPr>
-              <a:t>，</a:t>
-            </a:r>
-            <a:r>
-              <a:rPr lang="zh-CN" altLang="zh-CN" sz="2800" b="0" i="0" u="none">
-                <a:solidFill>
-                  <a:srgbClr val="000000"/>
-                </a:solidFill>
-                <a:effectLst/>
-                <a:latin typeface="Times New Roman" pitchFamily="28"/>
-                <a:ea typeface="宋体" pitchFamily="28"/>
-                <a:sym typeface="_⨹_5_c7107"/>
-              </a:rPr>
-              <a:t>短路电流为</a:t>
-            </a:r>
-            <a:br>
-              <a:rPr lang="zh-CN" altLang="zh-CN" sz="2800" b="0" i="0" u="none">
-                <a:solidFill>
-                  <a:srgbClr val="000000"/>
-                </a:solidFill>
-                <a:effectLst/>
-                <a:latin typeface="Times New Roman" pitchFamily="28"/>
-                <a:ea typeface="宋体" pitchFamily="28"/>
-              </a:rPr>
-            </a:br>
-            <a:r>
-              <a:rPr lang="en-US" altLang="zh-CN" sz="2800" b="0" i="0" u="none">
-                <a:solidFill>
-                  <a:srgbClr val="000000"/>
-                </a:solidFill>
-                <a:effectLst/>
-                <a:latin typeface="Times New Roman" pitchFamily="28"/>
-                <a:ea typeface="宋体" pitchFamily="28"/>
-              </a:rPr>
-              <a:t>40</a:t>
-            </a:r>
-            <a:r>
-              <a:rPr lang="zh-CN" altLang="zh-CN" sz="2800" b="0" i="0" u="none">
-                <a:solidFill>
-                  <a:srgbClr val="000000"/>
-                </a:solidFill>
-                <a:effectLst/>
-                <a:latin typeface="Times New Roman" pitchFamily="28"/>
-                <a:ea typeface="宋体" pitchFamily="28"/>
-              </a:rPr>
-              <a:t> </a:t>
-            </a:r>
-            <a:r>
-              <a:rPr lang="en-US" altLang="zh-CN" sz="2800" b="0" i="0" u="none">
-                <a:solidFill>
-                  <a:srgbClr val="000000"/>
-                </a:solidFill>
-                <a:effectLst/>
-                <a:latin typeface="Times New Roman" pitchFamily="28"/>
-                <a:ea typeface="宋体" pitchFamily="28"/>
-              </a:rPr>
-              <a:t>mA</a:t>
-            </a:r>
-            <a:r>
-              <a:rPr lang="zh-CN" altLang="zh-CN" sz="2800" b="0" i="0" u="none">
-                <a:solidFill>
-                  <a:srgbClr val="000000"/>
-                </a:solidFill>
-                <a:effectLst/>
-                <a:latin typeface="宋体" pitchFamily="28"/>
-                <a:ea typeface="宋体" pitchFamily="28"/>
-              </a:rPr>
-              <a:t>。</a:t>
-            </a:r>
-            <a:r>
-              <a:rPr lang="zh-CN" altLang="zh-CN" sz="2800" b="0" i="0" u="none">
-                <a:solidFill>
-                  <a:srgbClr val="000000"/>
-                </a:solidFill>
-                <a:effectLst/>
-                <a:latin typeface="Times New Roman" pitchFamily="28"/>
-                <a:ea typeface="宋体" pitchFamily="28"/>
-              </a:rPr>
-              <a:t>若将该电池板与一阻值为</a:t>
-            </a:r>
-            <a:r>
-              <a:rPr lang="en-US" altLang="zh-CN" sz="2800" b="0" i="0" u="none">
-                <a:solidFill>
-                  <a:srgbClr val="000000"/>
-                </a:solidFill>
-                <a:effectLst/>
-                <a:latin typeface="Times New Roman" pitchFamily="28"/>
-                <a:ea typeface="宋体" pitchFamily="28"/>
-              </a:rPr>
-              <a:t>20</a:t>
-            </a:r>
-            <a:r>
-              <a:rPr lang="zh-CN" altLang="zh-CN" sz="2800" b="0" i="0" u="none">
-                <a:solidFill>
-                  <a:srgbClr val="000000"/>
-                </a:solidFill>
-                <a:effectLst/>
-                <a:latin typeface="Times New Roman" pitchFamily="28"/>
-                <a:ea typeface="宋体" pitchFamily="28"/>
-              </a:rPr>
-              <a:t> </a:t>
-            </a:r>
-            <a:r>
-              <a:rPr lang="en-US" altLang="zh-CN" sz="2800" b="0" i="0" u="none">
-                <a:solidFill>
-                  <a:srgbClr val="000000"/>
-                </a:solidFill>
-                <a:effectLst/>
-                <a:latin typeface="Times New Roman" pitchFamily="28"/>
-                <a:ea typeface="宋体" pitchFamily="28"/>
-              </a:rPr>
-              <a:t>Ω</a:t>
-            </a:r>
-            <a:r>
-              <a:rPr lang="zh-CN" altLang="zh-CN" sz="2800" b="0" i="0" u="none">
-                <a:solidFill>
-                  <a:srgbClr val="000000"/>
-                </a:solidFill>
-                <a:effectLst/>
-                <a:latin typeface="Times New Roman" pitchFamily="28"/>
-                <a:ea typeface="宋体" pitchFamily="28"/>
-              </a:rPr>
-              <a:t>的电阻连成一闭合电路</a:t>
-            </a:r>
-            <a:r>
-              <a:rPr lang="zh-CN" altLang="zh-CN" sz="2800" b="0" i="0" u="none">
-                <a:solidFill>
-                  <a:srgbClr val="000000"/>
-                </a:solidFill>
-                <a:effectLst/>
-                <a:latin typeface="宋体" pitchFamily="28"/>
-                <a:ea typeface="宋体" pitchFamily="28"/>
-              </a:rPr>
-              <a:t>，</a:t>
-            </a:r>
-            <a:r>
-              <a:rPr lang="zh-CN" altLang="zh-CN" sz="2800" b="0" i="0" u="none">
-                <a:solidFill>
-                  <a:srgbClr val="000000"/>
-                </a:solidFill>
-                <a:effectLst/>
-                <a:latin typeface="Times New Roman" pitchFamily="28"/>
-                <a:ea typeface="宋体" pitchFamily="28"/>
-                <a:sym typeface="_⨹_4_51828"/>
-              </a:rPr>
-              <a:t>则路端电</a:t>
-            </a:r>
-            <a:br>
-              <a:rPr lang="zh-CN" altLang="zh-CN" sz="2800" b="0" i="0" u="none">
-                <a:solidFill>
-                  <a:srgbClr val="000000"/>
-                </a:solidFill>
-                <a:effectLst/>
-                <a:latin typeface="Times New Roman" pitchFamily="28"/>
-                <a:ea typeface="宋体" pitchFamily="28"/>
-              </a:rPr>
-            </a:br>
-            <a:r>
-              <a:rPr lang="zh-CN" altLang="zh-CN" sz="2800" b="0" i="0" u="none">
-                <a:solidFill>
-                  <a:srgbClr val="000000"/>
-                </a:solidFill>
-                <a:effectLst/>
-                <a:latin typeface="Times New Roman" pitchFamily="28"/>
-                <a:ea typeface="宋体" pitchFamily="28"/>
-              </a:rPr>
-              <a:t>压为</a:t>
-            </a:r>
-            <a:r>
-              <a:rPr lang="zh-CN" altLang="zh-CN" sz="2800" b="0" i="0" u="none">
-                <a:solidFill>
-                  <a:srgbClr val="000000"/>
-                </a:solidFill>
-                <a:effectLst/>
-                <a:latin typeface="宋体" pitchFamily="28"/>
-                <a:ea typeface="宋体" pitchFamily="28"/>
-              </a:rPr>
-              <a:t>（</a:t>
-            </a:r>
-            <a:r>
-              <a:rPr lang="zh-CN" altLang="zh-CN" sz="2800" b="0" i="1" u="none">
-                <a:solidFill>
-                  <a:srgbClr val="000000"/>
-                </a:solidFill>
-                <a:effectLst/>
-                <a:latin typeface="Times New Roman" pitchFamily="28"/>
-                <a:ea typeface="宋体" pitchFamily="28"/>
-              </a:rPr>
-              <a:t>　　</a:t>
-            </a:r>
-            <a:r>
-              <a:rPr lang="zh-CN" altLang="zh-CN" sz="2800" b="0" i="0" u="none">
-                <a:solidFill>
-                  <a:srgbClr val="000000"/>
-                </a:solidFill>
-                <a:effectLst/>
-                <a:latin typeface="宋体" pitchFamily="28"/>
-                <a:ea typeface="宋体" pitchFamily="28"/>
-              </a:rPr>
-              <a:t>）</a:t>
-            </a:r>
-          </a:p>
-        </p:txBody>
-      </p:sp>
-      <p:graphicFrame>
-        <p:nvGraphicFramePr>
-          <p:cNvPr id="16426" name="yt_table_16426" title="H_94.08">
-            <a:extLst>
-              <a:ext uri="{FF2B5EF4-FFF2-40B4-BE49-F238E27FC236}">
-                <a16:creationId xmlns:a16="http://schemas.microsoft.com/office/drawing/2014/main" id="{85F9CD91-DE56-4981-AD6D-3D4292DC4A24}"/>
-              </a:ext>
-            </a:extLst>
-          </p:cNvPr>
-          <p:cNvGraphicFramePr>
-            <a:graphicFrameLocks noGrp="1"/>
-          </p:cNvGraphicFramePr>
-          <p:nvPr/>
-        </p:nvGraphicFramePr>
-        <p:xfrm>
-          <a:off x="324066" y="2841539"/>
-          <a:ext cx="4919854" cy="1194816"/>
-        </p:xfrm>
-        <a:graphic>
-          <a:graphicData uri="http://schemas.openxmlformats.org/drawingml/2006/table">
-            <a:tbl>
-              <a:tblPr/>
-              <a:tblGrid>
-                <a:gridCol w="2926017">
-                  <a:extLst>
-                    <a:ext uri="{9D8B030D-6E8A-4147-A177-3AD203B41FA5}">
-                      <a16:colId xmlns:a16="http://schemas.microsoft.com/office/drawing/2014/main" val="10568"/>
-                    </a:ext>
-                  </a:extLst>
-                </a:gridCol>
-                <a:gridCol w="1993837">
-                  <a:extLst>
-                    <a:ext uri="{9D8B030D-6E8A-4147-A177-3AD203B41FA5}">
-                      <a16:colId xmlns:a16="http://schemas.microsoft.com/office/drawing/2014/main" val="10569"/>
-                    </a:ext>
-                  </a:extLst>
-                </a:gridCol>
-              </a:tblGrid>
-              <a:tr h="370840">
-                <a:tc>
-                  <a:txBody>
-                    <a:bodyPr/>
-                    <a:lstStyle/>
-                    <a:p>
-                      <a:pPr marL="523174" indent="-523174" algn="l" eaLnBrk="1" fontAlgn="ctr" latinLnBrk="0" hangingPunct="0">
-                        <a:lnSpc>
-                          <a:spcPct val="140000"/>
-                        </a:lnSpc>
-                      </a:pPr>
-                      <a:r>
-                        <a:rPr lang="en-US" altLang="zh-CN" sz="2800" b="0" i="0" u="none">
-                          <a:solidFill>
-                            <a:srgbClr val="000000"/>
-                          </a:solidFill>
-                          <a:effectLst/>
-                          <a:latin typeface="Times New Roman" pitchFamily="28"/>
-                          <a:ea typeface="宋体" pitchFamily="28"/>
-                        </a:rPr>
-                        <a:t>A</a:t>
-                      </a:r>
-                      <a:r>
-                        <a:rPr lang="en-US" altLang="zh-CN" sz="2800" b="0" i="0" u="none">
-                          <a:solidFill>
-                            <a:srgbClr val="000000"/>
-                          </a:solidFill>
-                          <a:effectLst/>
-                          <a:latin typeface="宋体" pitchFamily="28"/>
-                          <a:ea typeface="宋体" pitchFamily="28"/>
-                        </a:rPr>
-                        <a:t>.</a:t>
-                      </a:r>
-                      <a:r>
-                        <a:rPr lang="en-US" altLang="zh-CN" sz="2800" b="0" i="0" u="none">
-                          <a:solidFill>
-                            <a:srgbClr val="000000"/>
-                          </a:solidFill>
-                          <a:effectLst/>
-                          <a:latin typeface="Times New Roman" pitchFamily="28"/>
-                          <a:ea typeface="宋体" pitchFamily="28"/>
-                        </a:rPr>
-                        <a:t> 0</a:t>
-                      </a:r>
-                      <a:r>
-                        <a:rPr lang="en-US" altLang="zh-CN" sz="2800" b="0" i="0" u="none">
-                          <a:solidFill>
-                            <a:srgbClr val="000000"/>
-                          </a:solidFill>
-                          <a:effectLst/>
-                          <a:latin typeface="宋体" pitchFamily="28"/>
-                          <a:ea typeface="宋体" pitchFamily="28"/>
-                        </a:rPr>
-                        <a:t>.</a:t>
-                      </a:r>
-                      <a:r>
-                        <a:rPr lang="en-US" altLang="zh-CN" sz="2800" b="0" i="0" u="none">
-                          <a:solidFill>
-                            <a:srgbClr val="000000"/>
-                          </a:solidFill>
-                          <a:effectLst/>
-                          <a:latin typeface="Times New Roman" pitchFamily="28"/>
-                          <a:ea typeface="宋体" pitchFamily="28"/>
-                        </a:rPr>
-                        <a:t>1</a:t>
-                      </a:r>
-                      <a:r>
-                        <a:rPr lang="zh-CN" altLang="zh-CN" sz="2800" b="0" i="0" u="none">
-                          <a:solidFill>
-                            <a:srgbClr val="000000"/>
-                          </a:solidFill>
-                          <a:effectLst/>
-                          <a:latin typeface="Times New Roman" pitchFamily="28"/>
-                          <a:ea typeface="宋体" pitchFamily="28"/>
-                        </a:rPr>
-                        <a:t> </a:t>
-                      </a:r>
-                      <a:r>
-                        <a:rPr lang="en-US" altLang="zh-CN" sz="2800" b="0" i="0" u="none">
-                          <a:solidFill>
-                            <a:srgbClr val="000000"/>
-                          </a:solidFill>
-                          <a:effectLst/>
-                          <a:latin typeface="Times New Roman" pitchFamily="28"/>
-                          <a:ea typeface="宋体" pitchFamily="28"/>
-                        </a:rPr>
-                        <a:t>V</a:t>
-                      </a:r>
-                    </a:p>
-                  </a:txBody>
-                  <a:tcPr marL="0" marR="0" marT="0" marB="0" anchor="ctr">
-                    <a:lnL w="9522" cmpd="sng">
-                      <a:noFill/>
-                    </a:lnL>
-                    <a:lnR w="9522" cmpd="sng">
-                      <a:noFill/>
-                    </a:lnR>
-                    <a:lnT w="9522" cmpd="sng">
-                      <a:noFill/>
-                    </a:lnT>
-                    <a:lnB w="9522" cmpd="sng">
-                      <a:noFill/>
-                    </a:lnB>
-                  </a:tcPr>
-                </a:tc>
-                <a:tc>
-                  <a:txBody>
-                    <a:bodyPr/>
-                    <a:lstStyle/>
-                    <a:p>
-                      <a:pPr marL="523174" indent="-523174" algn="l" eaLnBrk="1" fontAlgn="ctr" latinLnBrk="0" hangingPunct="0">
-                        <a:lnSpc>
-                          <a:spcPct val="140000"/>
-                        </a:lnSpc>
-                      </a:pPr>
-                      <a:r>
-                        <a:rPr lang="en-US" altLang="zh-CN" sz="2800" b="0" i="0" u="none">
-                          <a:solidFill>
-                            <a:srgbClr val="000000"/>
-                          </a:solidFill>
-                          <a:effectLst/>
-                          <a:latin typeface="Times New Roman" pitchFamily="28"/>
-                          <a:ea typeface="宋体" pitchFamily="28"/>
-                        </a:rPr>
-                        <a:t>B</a:t>
-                      </a:r>
-                      <a:r>
-                        <a:rPr lang="en-US" altLang="zh-CN" sz="2800" b="0" i="0" u="none">
-                          <a:solidFill>
-                            <a:srgbClr val="000000"/>
-                          </a:solidFill>
-                          <a:effectLst/>
-                          <a:latin typeface="宋体" pitchFamily="28"/>
-                          <a:ea typeface="宋体" pitchFamily="28"/>
-                        </a:rPr>
-                        <a:t>.</a:t>
-                      </a:r>
-                      <a:r>
-                        <a:rPr lang="en-US" altLang="zh-CN" sz="2800" b="0" i="0" u="none">
-                          <a:solidFill>
-                            <a:srgbClr val="000000"/>
-                          </a:solidFill>
-                          <a:effectLst/>
-                          <a:latin typeface="Times New Roman" pitchFamily="28"/>
-                          <a:ea typeface="宋体" pitchFamily="28"/>
-                        </a:rPr>
-                        <a:t> 0</a:t>
-                      </a:r>
-                      <a:r>
-                        <a:rPr lang="en-US" altLang="zh-CN" sz="2800" b="0" i="0" u="none">
-                          <a:solidFill>
-                            <a:srgbClr val="000000"/>
-                          </a:solidFill>
-                          <a:effectLst/>
-                          <a:latin typeface="宋体" pitchFamily="28"/>
-                          <a:ea typeface="宋体" pitchFamily="28"/>
-                        </a:rPr>
-                        <a:t>.</a:t>
-                      </a:r>
-                      <a:r>
-                        <a:rPr lang="en-US" altLang="zh-CN" sz="2800" b="0" i="0" u="none">
-                          <a:solidFill>
-                            <a:srgbClr val="000000"/>
-                          </a:solidFill>
-                          <a:effectLst/>
-                          <a:latin typeface="Times New Roman" pitchFamily="28"/>
-                          <a:ea typeface="宋体" pitchFamily="28"/>
-                        </a:rPr>
-                        <a:t>2</a:t>
-                      </a:r>
-                      <a:r>
-                        <a:rPr lang="zh-CN" altLang="zh-CN" sz="2800" b="0" i="0" u="none">
-                          <a:solidFill>
-                            <a:srgbClr val="000000"/>
-                          </a:solidFill>
-                          <a:effectLst/>
-                          <a:latin typeface="Times New Roman" pitchFamily="28"/>
-                          <a:ea typeface="宋体" pitchFamily="28"/>
-                        </a:rPr>
-                        <a:t> </a:t>
-                      </a:r>
-                      <a:r>
-                        <a:rPr lang="en-US" altLang="zh-CN" sz="2800" b="0" i="0" u="none">
-                          <a:solidFill>
-                            <a:srgbClr val="000000"/>
-                          </a:solidFill>
-                          <a:effectLst/>
-                          <a:latin typeface="Times New Roman" pitchFamily="28"/>
-                          <a:ea typeface="宋体" pitchFamily="28"/>
-                        </a:rPr>
-                        <a:t>V</a:t>
-                      </a:r>
-                    </a:p>
-                  </a:txBody>
-                  <a:tcPr marL="0" marR="0" marT="0" marB="0" anchor="ctr">
-                    <a:lnL w="9522" cmpd="sng">
-                      <a:noFill/>
-                    </a:lnL>
-                    <a:lnR w="9522" cmpd="sng">
-                      <a:noFill/>
-                    </a:lnR>
-                    <a:lnT w="9522" cmpd="sng">
-                      <a:noFill/>
-                    </a:lnT>
-                    <a:lnB w="9522" cmpd="sng">
-                      <a:noFill/>
-                    </a:lnB>
-                  </a:tcPr>
-                </a:tc>
-                <a:extLst>
-                  <a:ext uri="{0D108BD9-81ED-4DB2-BD59-A6C34878D82A}">
-                    <a16:rowId xmlns:a16="http://schemas.microsoft.com/office/drawing/2014/main" val="11415"/>
-                  </a:ext>
-                </a:extLst>
-              </a:tr>
-              <a:tr h="370840">
-                <a:tc>
-                  <a:txBody>
-                    <a:bodyPr/>
-                    <a:lstStyle/>
-                    <a:p>
-                      <a:pPr marL="503492" indent="-503492" algn="l" eaLnBrk="1" fontAlgn="ctr" latinLnBrk="0" hangingPunct="0">
-                        <a:lnSpc>
-                          <a:spcPct val="140000"/>
-                        </a:lnSpc>
-                      </a:pPr>
-                      <a:r>
-                        <a:rPr lang="en-US" altLang="zh-CN" sz="2800" b="0" i="0" u="none">
-                          <a:solidFill>
-                            <a:srgbClr val="000000"/>
-                          </a:solidFill>
-                          <a:effectLst/>
-                          <a:latin typeface="Times New Roman" pitchFamily="28"/>
-                          <a:ea typeface="宋体" pitchFamily="28"/>
-                        </a:rPr>
-                        <a:t>C</a:t>
-                      </a:r>
-                      <a:r>
-                        <a:rPr lang="en-US" altLang="zh-CN" sz="2800" b="0" i="0" u="none">
-                          <a:solidFill>
-                            <a:srgbClr val="000000"/>
-                          </a:solidFill>
-                          <a:effectLst/>
-                          <a:latin typeface="宋体" pitchFamily="28"/>
-                          <a:ea typeface="宋体" pitchFamily="28"/>
-                        </a:rPr>
-                        <a:t>.</a:t>
-                      </a:r>
-                      <a:r>
-                        <a:rPr lang="en-US" altLang="zh-CN" sz="2800" b="0" i="0" u="none">
-                          <a:solidFill>
-                            <a:srgbClr val="000000"/>
-                          </a:solidFill>
-                          <a:effectLst/>
-                          <a:latin typeface="Times New Roman" pitchFamily="28"/>
-                          <a:ea typeface="宋体" pitchFamily="28"/>
-                        </a:rPr>
-                        <a:t> 0</a:t>
-                      </a:r>
-                      <a:r>
-                        <a:rPr lang="en-US" altLang="zh-CN" sz="2800" b="0" i="0" u="none">
-                          <a:solidFill>
-                            <a:srgbClr val="000000"/>
-                          </a:solidFill>
-                          <a:effectLst/>
-                          <a:latin typeface="宋体" pitchFamily="28"/>
-                          <a:ea typeface="宋体" pitchFamily="28"/>
-                        </a:rPr>
-                        <a:t>.</a:t>
-                      </a:r>
-                      <a:r>
-                        <a:rPr lang="en-US" altLang="zh-CN" sz="2800" b="0" i="0" u="none">
-                          <a:solidFill>
-                            <a:srgbClr val="000000"/>
-                          </a:solidFill>
-                          <a:effectLst/>
-                          <a:latin typeface="Times New Roman" pitchFamily="28"/>
-                          <a:ea typeface="宋体" pitchFamily="28"/>
-                        </a:rPr>
-                        <a:t>3</a:t>
-                      </a:r>
-                      <a:r>
-                        <a:rPr lang="zh-CN" altLang="zh-CN" sz="2800" b="0" i="0" u="none">
-                          <a:solidFill>
-                            <a:srgbClr val="000000"/>
-                          </a:solidFill>
-                          <a:effectLst/>
-                          <a:latin typeface="Times New Roman" pitchFamily="28"/>
-                          <a:ea typeface="宋体" pitchFamily="28"/>
-                        </a:rPr>
-                        <a:t> </a:t>
-                      </a:r>
-                      <a:r>
-                        <a:rPr lang="en-US" altLang="zh-CN" sz="2800" b="0" i="0" u="none">
-                          <a:solidFill>
-                            <a:srgbClr val="000000"/>
-                          </a:solidFill>
-                          <a:effectLst/>
-                          <a:latin typeface="Times New Roman" pitchFamily="28"/>
-                          <a:ea typeface="宋体" pitchFamily="28"/>
-                        </a:rPr>
-                        <a:t>V</a:t>
-                      </a:r>
-                    </a:p>
-                  </a:txBody>
-                  <a:tcPr marL="0" marR="0" marT="0" marB="0" anchor="ctr">
-                    <a:lnL w="9522" cmpd="sng">
-                      <a:noFill/>
-                    </a:lnL>
-                    <a:lnR w="9522" cmpd="sng">
-                      <a:noFill/>
-                    </a:lnR>
-                    <a:lnT w="9522" cmpd="sng">
-                      <a:noFill/>
-                    </a:lnT>
-                    <a:lnB w="9522" cmpd="sng">
-                      <a:noFill/>
-                    </a:lnB>
-                  </a:tcPr>
-                </a:tc>
-                <a:tc>
-                  <a:txBody>
-                    <a:bodyPr/>
-                    <a:lstStyle/>
-                    <a:p>
-                      <a:pPr marL="503492" indent="-503492" algn="l" eaLnBrk="1" fontAlgn="ctr" latinLnBrk="0" hangingPunct="0">
-                        <a:lnSpc>
-                          <a:spcPct val="140000"/>
-                        </a:lnSpc>
-                      </a:pPr>
-                      <a:r>
-                        <a:rPr lang="en-US" altLang="zh-CN" sz="2800" b="0" i="0" u="none">
-                          <a:solidFill>
-                            <a:srgbClr val="000000"/>
-                          </a:solidFill>
-                          <a:effectLst/>
-                          <a:latin typeface="Times New Roman" pitchFamily="28"/>
-                          <a:ea typeface="宋体" pitchFamily="28"/>
-                        </a:rPr>
-                        <a:t>D</a:t>
-                      </a:r>
-                      <a:r>
-                        <a:rPr lang="en-US" altLang="zh-CN" sz="2800" b="0" i="0" u="none">
-                          <a:solidFill>
-                            <a:srgbClr val="000000"/>
-                          </a:solidFill>
-                          <a:effectLst/>
-                          <a:latin typeface="宋体" pitchFamily="28"/>
-                          <a:ea typeface="宋体" pitchFamily="28"/>
-                        </a:rPr>
-                        <a:t>.</a:t>
-                      </a:r>
-                      <a:r>
-                        <a:rPr lang="en-US" altLang="zh-CN" sz="2800" b="0" i="0" u="none">
-                          <a:solidFill>
-                            <a:srgbClr val="000000"/>
-                          </a:solidFill>
-                          <a:effectLst/>
-                          <a:latin typeface="Times New Roman" pitchFamily="28"/>
-                          <a:ea typeface="宋体" pitchFamily="28"/>
-                        </a:rPr>
-                        <a:t> 0</a:t>
-                      </a:r>
-                      <a:r>
-                        <a:rPr lang="en-US" altLang="zh-CN" sz="2800" b="0" i="0" u="none">
-                          <a:solidFill>
-                            <a:srgbClr val="000000"/>
-                          </a:solidFill>
-                          <a:effectLst/>
-                          <a:latin typeface="宋体" pitchFamily="28"/>
-                          <a:ea typeface="宋体" pitchFamily="28"/>
-                        </a:rPr>
-                        <a:t>.</a:t>
-                      </a:r>
-                      <a:r>
-                        <a:rPr lang="en-US" altLang="zh-CN" sz="2800" b="0" i="0" u="none">
-                          <a:solidFill>
-                            <a:srgbClr val="000000"/>
-                          </a:solidFill>
-                          <a:effectLst/>
-                          <a:latin typeface="Times New Roman" pitchFamily="28"/>
-                          <a:ea typeface="宋体" pitchFamily="28"/>
-                        </a:rPr>
-                        <a:t>4</a:t>
-                      </a:r>
-                      <a:r>
-                        <a:rPr lang="zh-CN" altLang="zh-CN" sz="2800" b="0" i="0" u="none">
-                          <a:solidFill>
-                            <a:srgbClr val="000000"/>
-                          </a:solidFill>
-                          <a:effectLst/>
-                          <a:latin typeface="Times New Roman" pitchFamily="28"/>
-                          <a:ea typeface="宋体" pitchFamily="28"/>
-                        </a:rPr>
-                        <a:t> </a:t>
-                      </a:r>
-                      <a:r>
-                        <a:rPr lang="en-US" altLang="zh-CN" sz="2800" b="0" i="0" u="none">
-                          <a:solidFill>
-                            <a:srgbClr val="000000"/>
-                          </a:solidFill>
-                          <a:effectLst/>
-                          <a:latin typeface="Times New Roman" pitchFamily="28"/>
-                          <a:ea typeface="宋体" pitchFamily="28"/>
-                        </a:rPr>
-                        <a:t>V</a:t>
-                      </a:r>
-                    </a:p>
-                  </a:txBody>
-                  <a:tcPr marL="0" marR="0" marT="0" marB="0" anchor="ctr">
-                    <a:lnL w="9522" cmpd="sng">
-                      <a:noFill/>
-                    </a:lnL>
-                    <a:lnR w="9522" cmpd="sng">
-                      <a:noFill/>
-                    </a:lnR>
-                    <a:lnT w="9522" cmpd="sng">
-                      <a:noFill/>
-                    </a:lnT>
-                    <a:lnB w="9522" cmpd="sng">
-                      <a:noFill/>
-                    </a:lnB>
-                  </a:tcPr>
-                </a:tc>
-                <a:extLst>
-                  <a:ext uri="{0D108BD9-81ED-4DB2-BD59-A6C34878D82A}">
-                    <a16:rowId xmlns:a16="http://schemas.microsoft.com/office/drawing/2014/main" val="11416"/>
-                  </a:ext>
-                </a:extLst>
-              </a:tr>
-            </a:tbl>
-          </a:graphicData>
-        </a:graphic>
-      </p:graphicFrame>
-      <p:sp>
-        <p:nvSpPr>
-          <p:cNvPr id="5" name="矩形 4"/>
-          <p:cNvSpPr/>
-          <p:nvPr/>
-        </p:nvSpPr>
-        <p:spPr>
-          <a:xfrm>
-            <a:off x="2969377" y="3493929"/>
-            <a:ext cx="761669" cy="861774"/>
-          </a:xfrm>
-          <a:prstGeom prst="rect">
-            <a:avLst/>
-          </a:prstGeom>
-        </p:spPr>
-        <p:txBody>
-          <a:bodyPr wrap="square">
-            <a:spAutoFit/>
-          </a:bodyPr>
-          <a:lstStyle/>
-          <a:p>
-            <a:r>
-              <a:rPr lang="en-US" altLang="zh-CN" sz="5000" b="1" dirty="0">
-                <a:solidFill>
-                  <a:srgbClr val="C00000"/>
-                </a:solidFill>
-                <a:latin typeface="华文细黑" panose="02010600040101010101" pitchFamily="2" charset="-122"/>
-                <a:ea typeface="华文细黑" panose="02010600040101010101" pitchFamily="2" charset="-122"/>
-              </a:rPr>
-              <a:t>√  </a:t>
-            </a:r>
-            <a:endParaRPr lang="zh-CN" altLang="en-US" sz="5000" b="1" dirty="0">
-              <a:solidFill>
-                <a:srgbClr val="C00000"/>
-              </a:solidFill>
-              <a:latin typeface="华文细黑" panose="02010600040101010101" pitchFamily="2" charset="-122"/>
-              <a:ea typeface="华文细黑" panose="02010600040101010101" pitchFamily="2" charset="-122"/>
-            </a:endParaRPr>
-          </a:p>
-        </p:txBody>
-      </p:sp>
-    </p:spTree>
-  </p:cSld>
-  <p:clrMapOvr>
-    <a:masterClrMapping/>
-  </p:clrMapOvr>
-  <mc:AlternateContent xmlns:mc="http://schemas.openxmlformats.org/markup-compatibility/2006" xmlns:p15="http://schemas.microsoft.com/office/powerpoint/2012/main">
-    <mc:Choice Requires="p15">
-      <p:transition xmlns:p14="http://schemas.microsoft.com/office/powerpoint/2010/main" spd="slow" p14:dur="1250">
-        <p15:prstTrans prst="pageCurlDouble"/>
-      </p:transition>
-    </mc:Choice>
-    <mc:Fallback xmlns:p14="http://schemas.microsoft.com/office/powerpoint/2010/main" xmlns:a16="http://schemas.microsoft.com/office/drawing/2014/main" xmlns:a14="http://schemas.microsoft.com/office/drawing/2010/main" xmlns="">
-      <p:transition spd="slow">
-        <p:fade/>
-      </p:transition>
-    </mc:Fallback>
-  </mc:AlternateContent>
-  <p:timing>
-    <p:tnLst>
-      <p:par>
-        <p:cTn id="1" dur="indefinite" restart="never" nodeType="tmRoot">
-          <p:childTnLst>
-            <p:seq concurrent="1" nextAc="seek">
-              <p:cTn id="2" dur="indefinite" nodeType="mainSeq">
-                <p:childTnLst>
-                  <p:par>
-                    <p:cTn id="3" fill="hold">
-                      <p:stCondLst>
-                        <p:cond delay="indefinite"/>
-                      </p:stCondLst>
-                      <p:childTnLst>
-                        <p:par>
-                          <p:cTn id="4" fill="hold">
-                            <p:stCondLst>
-                              <p:cond delay="0"/>
-                            </p:stCondLst>
-                            <p:childTnLst>
-                              <p:par>
-                                <p:cTn id="5" presetID="2" presetClass="entr" presetSubtype="4" fill="hold" grpId="0" nodeType="clickEffect">
-                                  <p:stCondLst>
-                                    <p:cond delay="0"/>
-                                  </p:stCondLst>
-                                  <p:childTnLst>
-                                    <p:set>
-                                      <p:cBhvr>
-                                        <p:cTn id="6" dur="1" fill="hold">
-                                          <p:stCondLst>
-                                            <p:cond delay="0"/>
-                                          </p:stCondLst>
-                                        </p:cTn>
-                                        <p:tgtEl>
-                                          <p:spTgt spid="5"/>
-                                        </p:tgtEl>
-                                        <p:attrNameLst>
-                                          <p:attrName>style.visibility</p:attrName>
-                                        </p:attrNameLst>
-                                      </p:cBhvr>
-                                      <p:to>
-                                        <p:strVal val="visible"/>
-                                      </p:to>
-                                    </p:set>
-                                    <p:anim calcmode="lin" valueType="num">
-                                      <p:cBhvr additive="base">
-                                        <p:cTn id="7" dur="500" fill="hold"/>
-                                        <p:tgtEl>
-                                          <p:spTgt spid="5"/>
-                                        </p:tgtEl>
-                                        <p:attrNameLst>
-                                          <p:attrName>ppt_x</p:attrName>
-                                        </p:attrNameLst>
-                                      </p:cBhvr>
-                                      <p:tavLst>
-                                        <p:tav tm="0">
-                                          <p:val>
-                                            <p:strVal val="#ppt_x"/>
-                                          </p:val>
-                                        </p:tav>
-                                        <p:tav tm="100000">
-                                          <p:val>
-                                            <p:strVal val="#ppt_x"/>
-                                          </p:val>
-                                        </p:tav>
-                                      </p:tavLst>
-                                    </p:anim>
-                                    <p:anim calcmode="lin" valueType="num">
-                                      <p:cBhvr additive="base">
-                                        <p:cTn id="8" dur="500" fill="hold"/>
-                                        <p:tgtEl>
-                                          <p:spTgt spid="5"/>
-                                        </p:tgtEl>
-                                        <p:attrNameLst>
-                                          <p:attrName>ppt_y</p:attrName>
-                                        </p:attrNameLst>
-                                      </p:cBhvr>
-                                      <p:tavLst>
-                                        <p:tav tm="0">
-                                          <p:val>
-                                            <p:strVal val="1+#ppt_h/2"/>
-                                          </p:val>
-                                        </p:tav>
-                                        <p:tav tm="100000">
-                                          <p:val>
-                                            <p:strVal val="#ppt_y"/>
-                                          </p:val>
-                                        </p:tav>
-                                      </p:tavLst>
-                                    </p:anim>
-                                  </p:childTnLst>
-                                </p:cTn>
-                              </p:par>
-                            </p:childTnLst>
-                          </p:cTn>
-                        </p:par>
-                      </p:childTnLst>
-                    </p:cTn>
-                  </p:par>
-                </p:childTnLst>
-              </p:cTn>
-              <p:prevCondLst>
-                <p:cond evt="onPrev" delay="0">
-                  <p:tgtEl>
-                    <p:sldTgt/>
-                  </p:tgtEl>
-                </p:cond>
-              </p:prevCondLst>
-              <p:nextCondLst>
-                <p:cond evt="onNext" delay="0">
-                  <p:tgtEl>
-                    <p:sldTgt/>
-                  </p:tgtEl>
-                </p:cond>
-              </p:nextCondLst>
-            </p:seq>
-          </p:childTnLst>
-        </p:cTn>
-      </p:par>
-    </p:tnLst>
-    <p:bldLst>
-      <p:bldP spid="5" grpId="0"/>
     </p:bldLst>
   </p:timing>
 </p:sld>
